--- a/apresentacao/laboratorio_estresse_semantico.pptx
+++ b/apresentacao/laboratorio_estresse_semantico.pptx
@@ -6,11 +6,16 @@
   </p:sldMasterIdLst>
   <p:sldIdLst>
     <p:sldId id="256" r:id="rId7"/>
+    <p:sldId id="263" r:id="rId14"/>
     <p:sldId id="257" r:id="rId8"/>
     <p:sldId id="258" r:id="rId9"/>
     <p:sldId id="259" r:id="rId10"/>
+    <p:sldId id="264" r:id="rId15"/>
+    <p:sldId id="265" r:id="rId16"/>
     <p:sldId id="260" r:id="rId11"/>
     <p:sldId id="261" r:id="rId12"/>
+    <p:sldId id="266" r:id="rId17"/>
+    <p:sldId id="267" r:id="rId18"/>
     <p:sldId id="262" r:id="rId13"/>
   </p:sldIdLst>
   <p:sldSz cx="12191695" cy="6858000" type="screen4x3"/>
@@ -3303,6 +3308,2432 @@
 </p:sld>
 </file>
 
+<file path=ppt/slides/slide10.xml><?xml version="1.0" encoding="utf-8"?>
+<p:sld xmlns:a="http://schemas.openxmlformats.org/drawingml/2006/main" xmlns:p="http://schemas.openxmlformats.org/presentationml/2006/main" xmlns:r="http://schemas.openxmlformats.org/officeDocument/2006/relationships">
+  <p:cSld>
+    <p:bg>
+      <p:bgPr>
+        <a:solidFill>
+          <a:srgbClr val="FFFFFF"/>
+        </a:solidFill>
+        <a:effectLst/>
+      </p:bgPr>
+    </p:bg>
+    <p:spTree>
+      <p:nvGrpSpPr>
+        <p:cNvPr id="1" name=""/>
+        <p:cNvGrpSpPr/>
+        <p:nvPr/>
+      </p:nvGrpSpPr>
+      <p:grpSpPr/>
+      <p:sp>
+        <p:nvSpPr>
+          <p:cNvPr id="2" name="TextBox 2"/>
+          <p:cNvSpPr txBox="1"/>
+          <p:nvPr/>
+        </p:nvSpPr>
+        <p:spPr>
+          <a:xfrm>
+            <a:off x="640080" y="411480"/>
+            <a:ext cx="10911535" cy="320040"/>
+          </a:xfrm>
+          <a:prstGeom prst="rect">
+            <a:avLst/>
+          </a:prstGeom>
+          <a:noFill/>
+        </p:spPr>
+        <p:txBody>
+          <a:bodyPr wrap="square" lIns="0" rIns="0" tIns="0" bIns="0">
+            <a:spAutoFit/>
+          </a:bodyPr>
+          <a:lstStyle/>
+          <a:p>
+            <a:pPr algn="l"/>
+            <a:r>
+              <a:rPr sz="1200" b="1" i="0">
+                <a:solidFill>
+                  <a:srgbClr val="3B5BDB"/>
+                </a:solidFill>
+                <a:latin typeface="Calibri"/>
+              </a:rPr>
+              <a:t>EXEMPLO</a:t>
+            </a:r>
+          </a:p>
+        </p:txBody>
+      </p:sp>
+      <p:sp>
+        <p:nvSpPr>
+          <p:cNvPr id="3" name="TextBox 3"/>
+          <p:cNvSpPr txBox="1"/>
+          <p:nvPr/>
+        </p:nvSpPr>
+        <p:spPr>
+          <a:xfrm>
+            <a:off x="640080" y="777240"/>
+            <a:ext cx="10911535" cy="731520"/>
+          </a:xfrm>
+          <a:prstGeom prst="rect">
+            <a:avLst/>
+          </a:prstGeom>
+          <a:noFill/>
+        </p:spPr>
+        <p:txBody>
+          <a:bodyPr wrap="square" lIns="0" rIns="0" tIns="0" bIns="0">
+            <a:spAutoFit/>
+          </a:bodyPr>
+          <a:lstStyle/>
+          <a:p>
+            <a:pPr algn="l"/>
+            <a:r>
+              <a:rPr sz="3000" b="1" i="0">
+                <a:solidFill>
+                  <a:srgbClr val="1B2A4A"/>
+                </a:solidFill>
+                <a:latin typeface="Calibri"/>
+              </a:rPr>
+              <a:t>Um par do dataset: antítese em Vieira</a:t>
+            </a:r>
+          </a:p>
+        </p:txBody>
+      </p:sp>
+      <p:sp>
+        <p:nvSpPr>
+          <p:cNvPr id="4" name="Rounded Rectangle 4"/>
+          <p:cNvSpPr/>
+          <p:nvPr/>
+        </p:nvSpPr>
+        <p:spPr>
+          <a:xfrm>
+            <a:off x="640080" y="1600200"/>
+            <a:ext cx="5029200" cy="1350000"/>
+          </a:xfrm>
+          <a:prstGeom prst="roundRect">
+            <a:avLst>
+              <a:gd name="adj" fmla="val 6000"/>
+            </a:avLst>
+          </a:prstGeom>
+          <a:solidFill>
+            <a:srgbClr val="FDECE0"/>
+          </a:solidFill>
+          <a:ln>
+            <a:noFill/>
+          </a:ln>
+          <a:effectLst/>
+        </p:spPr>
+        <p:style>
+          <a:lnRef idx="1">
+            <a:schemeClr val="accent1"/>
+          </a:lnRef>
+          <a:fillRef idx="3">
+            <a:schemeClr val="accent1"/>
+          </a:fillRef>
+          <a:effectRef idx="2">
+            <a:schemeClr val="accent1"/>
+          </a:effectRef>
+          <a:fontRef idx="minor">
+            <a:schemeClr val="lt1"/>
+          </a:fontRef>
+        </p:style>
+        <p:txBody>
+          <a:bodyPr rtlCol="0" anchor="ctr" wrap="square" lIns="274320" rIns="274320"/>
+          <a:lstStyle/>
+          <a:p>
+            <a:pPr algn="l">
+              <a:lnSpc>
+                <a:spcPct val="120000"/>
+              </a:lnSpc>
+            </a:pPr>
+            <a:r>
+              <a:rPr sz="1150" b="1" i="0">
+                <a:solidFill>
+                  <a:srgbClr val="E8590C"/>
+                </a:solidFill>
+                <a:latin typeface="Calibri"/>
+              </a:rPr>
+              <a:t>TEXTO ORIGINAL (COMPLEXO)</a:t>
+            </a:r>
+          </a:p>
+          <a:p>
+            <a:pPr algn="l">
+              <a:lnSpc>
+                <a:spcPct val="120000"/>
+              </a:lnSpc>
+              <a:spcBef>
+                <a:spcPts val="500"/>
+              </a:spcBef>
+            </a:pPr>
+            <a:r>
+              <a:rPr sz="1400" b="0" i="1">
+                <a:solidFill>
+                  <a:srgbClr val="1B2A4A"/>
+                </a:solidFill>
+                <a:latin typeface="Calibri"/>
+              </a:rPr>
+              <a:t>“Mas ainda a [desgraça] do semeador do nosso Evangelho não foi a maior. A maior é a que se tem experimentado na seara aonde eu fui, e para onde venho.”</a:t>
+            </a:r>
+          </a:p>
+        </p:txBody>
+      </p:sp>
+      <p:sp>
+        <p:nvSpPr>
+          <p:cNvPr id="5" name="Rounded Rectangle 5"/>
+          <p:cNvSpPr/>
+          <p:nvPr/>
+        </p:nvSpPr>
+        <p:spPr>
+          <a:xfrm>
+            <a:off x="6263640" y="1600200"/>
+            <a:ext cx="5212080" cy="1350000"/>
+          </a:xfrm>
+          <a:prstGeom prst="roundRect">
+            <a:avLst>
+              <a:gd name="adj" fmla="val 6000"/>
+            </a:avLst>
+          </a:prstGeom>
+          <a:solidFill>
+            <a:srgbClr val="DFF6EE"/>
+          </a:solidFill>
+          <a:ln>
+            <a:noFill/>
+          </a:ln>
+          <a:effectLst/>
+        </p:spPr>
+        <p:style>
+          <a:lnRef idx="1">
+            <a:schemeClr val="accent1"/>
+          </a:lnRef>
+          <a:fillRef idx="3">
+            <a:schemeClr val="accent1"/>
+          </a:fillRef>
+          <a:effectRef idx="2">
+            <a:schemeClr val="accent1"/>
+          </a:effectRef>
+          <a:fontRef idx="minor">
+            <a:schemeClr val="lt1"/>
+          </a:fontRef>
+        </p:style>
+        <p:txBody>
+          <a:bodyPr rtlCol="0" anchor="ctr" wrap="square" lIns="274320" rIns="274320"/>
+          <a:lstStyle/>
+          <a:p>
+            <a:pPr algn="l">
+              <a:lnSpc>
+                <a:spcPct val="120000"/>
+              </a:lnSpc>
+            </a:pPr>
+            <a:r>
+              <a:rPr sz="1150" b="1" i="0">
+                <a:solidFill>
+                  <a:srgbClr val="0CA678"/>
+                </a:solidFill>
+                <a:latin typeface="Calibri"/>
+              </a:rPr>
+              <a:t>TEXTO SIMPLIFICADO</a:t>
+            </a:r>
+          </a:p>
+          <a:p>
+            <a:pPr algn="l">
+              <a:lnSpc>
+                <a:spcPct val="120000"/>
+              </a:lnSpc>
+              <a:spcBef>
+                <a:spcPts val="500"/>
+              </a:spcBef>
+            </a:pPr>
+            <a:r>
+              <a:rPr sz="1400" b="0" i="1">
+                <a:solidFill>
+                  <a:srgbClr val="1B2A4A"/>
+                </a:solidFill>
+                <a:latin typeface="Calibri"/>
+              </a:rPr>
+              <a:t>“No entanto, o sofrimento dos pregadores do Evangelho em geral não foi o pior. O pior sofrimento é aquele que os missionários vivenciaram na região do Maranhão, de onde eu voltei recentemente e para onde pretendo ir novamente.”</a:t>
+            </a:r>
+          </a:p>
+        </p:txBody>
+      </p:sp>
+      <p:sp>
+        <p:nvSpPr>
+          <p:cNvPr id="6" name="TextBox 6"/>
+          <p:cNvSpPr txBox="1"/>
+          <p:nvPr/>
+        </p:nvSpPr>
+        <p:spPr>
+          <a:xfrm>
+            <a:off x="640080" y="3178800"/>
+            <a:ext cx="10911535" cy="750000"/>
+          </a:xfrm>
+          <a:prstGeom prst="rect">
+            <a:avLst/>
+          </a:prstGeom>
+          <a:noFill/>
+        </p:spPr>
+        <p:txBody>
+          <a:bodyPr wrap="square" lIns="0" rIns="0" tIns="0" bIns="0">
+            <a:spAutoFit/>
+          </a:bodyPr>
+          <a:lstStyle/>
+          <a:p>
+            <a:pPr algn="l">
+              <a:lnSpc>
+                <a:spcPct val="120000"/>
+              </a:lnSpc>
+            </a:pPr>
+            <a:r>
+              <a:rPr sz="1500" b="0" i="0">
+                <a:solidFill>
+                  <a:srgbClr val="495057"/>
+                </a:solidFill>
+                <a:latin typeface="Calibri"/>
+              </a:rPr>
+              <a:t>Ambos dizem essencialmente a mesma coisa, mas o original usa a antítese retórica de Vieira (“não foi a maior… a maior é…”), enquanto a versão simplificada reescreve isso de forma direta. Esse é um dos pares com maior divergência entre os três modelos testados na análise exploratória.</a:t>
+            </a:r>
+          </a:p>
+        </p:txBody>
+      </p:sp>
+      <p:sp>
+        <p:nvSpPr>
+          <p:cNvPr id="7" name="Rounded Rectangle 7"/>
+          <p:cNvSpPr/>
+          <p:nvPr/>
+        </p:nvSpPr>
+        <p:spPr>
+          <a:xfrm>
+            <a:off x="640080" y="4157400"/>
+            <a:ext cx="3484778" cy="685800"/>
+          </a:xfrm>
+          <a:prstGeom prst="roundRect">
+            <a:avLst>
+              <a:gd name="adj" fmla="val 14000"/>
+            </a:avLst>
+          </a:prstGeom>
+          <a:solidFill>
+            <a:srgbClr val="F6F7F9"/>
+          </a:solidFill>
+          <a:ln>
+            <a:noFill/>
+          </a:ln>
+          <a:effectLst/>
+        </p:spPr>
+        <p:style>
+          <a:lnRef idx="1">
+            <a:schemeClr val="accent1"/>
+          </a:lnRef>
+          <a:fillRef idx="3">
+            <a:schemeClr val="accent1"/>
+          </a:fillRef>
+          <a:effectRef idx="2">
+            <a:schemeClr val="accent1"/>
+          </a:effectRef>
+          <a:fontRef idx="minor">
+            <a:schemeClr val="lt1"/>
+          </a:fontRef>
+        </p:style>
+        <p:txBody>
+          <a:bodyPr rtlCol="0" anchor="ctr" wrap="square" lIns="228600" rIns="228600"/>
+          <a:lstStyle/>
+          <a:p>
+            <a:pPr algn="ctr"/>
+            <a:r>
+              <a:rPr sz="1450" b="1" i="0">
+                <a:solidFill>
+                  <a:srgbClr val="1B2A4A"/>
+                </a:solidFill>
+                <a:latin typeface="Calibri"/>
+              </a:rPr>
+              <a:t>BGE-M3  </a:t>
+            </a:r>
+            <a:r>
+              <a:rPr sz="1450" b="0" i="0">
+                <a:solidFill>
+                  <a:srgbClr val="868E96"/>
+                </a:solidFill>
+                <a:latin typeface="Calibri"/>
+              </a:rPr>
+              <a:t>≈ 0,71</a:t>
+            </a:r>
+          </a:p>
+        </p:txBody>
+      </p:sp>
+      <p:sp>
+        <p:nvSpPr>
+          <p:cNvPr id="8" name="Rounded Rectangle 8"/>
+          <p:cNvSpPr/>
+          <p:nvPr/>
+        </p:nvSpPr>
+        <p:spPr>
+          <a:xfrm>
+            <a:off x="4353458" y="4157400"/>
+            <a:ext cx="3484778" cy="685800"/>
+          </a:xfrm>
+          <a:prstGeom prst="roundRect">
+            <a:avLst>
+              <a:gd name="adj" fmla="val 14000"/>
+            </a:avLst>
+          </a:prstGeom>
+          <a:solidFill>
+            <a:srgbClr val="F6F7F9"/>
+          </a:solidFill>
+          <a:ln>
+            <a:noFill/>
+          </a:ln>
+          <a:effectLst/>
+        </p:spPr>
+        <p:style>
+          <a:lnRef idx="1">
+            <a:schemeClr val="accent1"/>
+          </a:lnRef>
+          <a:fillRef idx="3">
+            <a:schemeClr val="accent1"/>
+          </a:fillRef>
+          <a:effectRef idx="2">
+            <a:schemeClr val="accent1"/>
+          </a:effectRef>
+          <a:fontRef idx="minor">
+            <a:schemeClr val="lt1"/>
+          </a:fontRef>
+        </p:style>
+        <p:txBody>
+          <a:bodyPr rtlCol="0" anchor="ctr" wrap="square" lIns="228600" rIns="228600"/>
+          <a:lstStyle/>
+          <a:p>
+            <a:pPr algn="ctr"/>
+            <a:r>
+              <a:rPr sz="1450" b="1" i="0">
+                <a:solidFill>
+                  <a:srgbClr val="1B2A4A"/>
+                </a:solidFill>
+                <a:latin typeface="Calibri"/>
+              </a:rPr>
+              <a:t>LaBSE  </a:t>
+            </a:r>
+            <a:r>
+              <a:rPr sz="1450" b="0" i="0">
+                <a:solidFill>
+                  <a:srgbClr val="868E96"/>
+                </a:solidFill>
+                <a:latin typeface="Calibri"/>
+              </a:rPr>
+              <a:t>≈ 0,74</a:t>
+            </a:r>
+          </a:p>
+        </p:txBody>
+      </p:sp>
+      <p:sp>
+        <p:nvSpPr>
+          <p:cNvPr id="9" name="Rounded Rectangle 9"/>
+          <p:cNvSpPr/>
+          <p:nvPr/>
+        </p:nvSpPr>
+        <p:spPr>
+          <a:xfrm>
+            <a:off x="8066836" y="4157400"/>
+            <a:ext cx="3484778" cy="685800"/>
+          </a:xfrm>
+          <a:prstGeom prst="roundRect">
+            <a:avLst>
+              <a:gd name="adj" fmla="val 14000"/>
+            </a:avLst>
+          </a:prstGeom>
+          <a:solidFill>
+            <a:srgbClr val="F6F7F9"/>
+          </a:solidFill>
+          <a:ln>
+            <a:noFill/>
+          </a:ln>
+          <a:effectLst/>
+        </p:spPr>
+        <p:style>
+          <a:lnRef idx="1">
+            <a:schemeClr val="accent1"/>
+          </a:lnRef>
+          <a:fillRef idx="3">
+            <a:schemeClr val="accent1"/>
+          </a:fillRef>
+          <a:effectRef idx="2">
+            <a:schemeClr val="accent1"/>
+          </a:effectRef>
+          <a:fontRef idx="minor">
+            <a:schemeClr val="lt1"/>
+          </a:fontRef>
+        </p:style>
+        <p:txBody>
+          <a:bodyPr rtlCol="0" anchor="ctr" wrap="square" lIns="228600" rIns="228600"/>
+          <a:lstStyle/>
+          <a:p>
+            <a:pPr algn="ctr"/>
+            <a:r>
+              <a:rPr sz="1450" b="1" i="0">
+                <a:solidFill>
+                  <a:srgbClr val="1B2A4A"/>
+                </a:solidFill>
+                <a:latin typeface="Calibri"/>
+              </a:rPr>
+              <a:t>EmbeddingGemma  </a:t>
+            </a:r>
+            <a:r>
+              <a:rPr sz="1450" b="0" i="0">
+                <a:solidFill>
+                  <a:srgbClr val="868E96"/>
+                </a:solidFill>
+                <a:latin typeface="Calibri"/>
+              </a:rPr>
+              <a:t>≈ 0,60</a:t>
+            </a:r>
+          </a:p>
+        </p:txBody>
+      </p:sp>
+      <p:sp>
+        <p:nvSpPr>
+          <p:cNvPr id="10" name="Rounded Rectangle 10"/>
+          <p:cNvSpPr/>
+          <p:nvPr/>
+        </p:nvSpPr>
+        <p:spPr>
+          <a:xfrm>
+            <a:off x="640080" y="5532120"/>
+            <a:ext cx="10911535" cy="777240"/>
+          </a:xfrm>
+          <a:prstGeom prst="roundRect">
+            <a:avLst>
+              <a:gd name="adj" fmla="val 10000"/>
+            </a:avLst>
+          </a:prstGeom>
+          <a:solidFill>
+            <a:srgbClr val="E7ECFC"/>
+          </a:solidFill>
+          <a:ln>
+            <a:noFill/>
+          </a:ln>
+          <a:effectLst/>
+        </p:spPr>
+        <p:style>
+          <a:lnRef idx="1">
+            <a:schemeClr val="accent1"/>
+          </a:lnRef>
+          <a:fillRef idx="3">
+            <a:schemeClr val="accent1"/>
+          </a:fillRef>
+          <a:effectRef idx="2">
+            <a:schemeClr val="accent1"/>
+          </a:effectRef>
+          <a:fontRef idx="minor">
+            <a:schemeClr val="lt1"/>
+          </a:fontRef>
+        </p:style>
+        <p:txBody>
+          <a:bodyPr rtlCol="0" anchor="ctr" wrap="square" lIns="320040" rIns="320040"/>
+          <a:lstStyle/>
+          <a:p>
+            <a:pPr algn="l">
+              <a:lnSpc>
+                <a:spcPct val="112000"/>
+              </a:lnSpc>
+            </a:pPr>
+            <a:r>
+              <a:rPr sz="1400" b="0" i="1">
+                <a:solidFill>
+                  <a:srgbClr val="1B2A4A"/>
+                </a:solidFill>
+                <a:latin typeface="Calibri"/>
+              </a:rPr>
+              <a:t>Padrão consistente com o piloto: figuras que dependem de oposição lógica — como a antítese — tendem a “derivar” mais no espaço de embedding do que reconstruções puramente sintáticas.</a:t>
+            </a:r>
+          </a:p>
+        </p:txBody>
+      </p:sp>
+      <p:sp>
+        <p:nvSpPr>
+          <p:cNvPr id="11" name="TextBox 11"/>
+          <p:cNvSpPr txBox="1"/>
+          <p:nvPr/>
+        </p:nvSpPr>
+        <p:spPr>
+          <a:xfrm>
+            <a:off x="640080" y="6400800"/>
+            <a:ext cx="5486400" cy="320040"/>
+          </a:xfrm>
+          <a:prstGeom prst="rect">
+            <a:avLst/>
+          </a:prstGeom>
+          <a:noFill/>
+        </p:spPr>
+        <p:txBody>
+          <a:bodyPr wrap="square" lIns="0" rIns="0" tIns="0" bIns="0">
+            <a:spAutoFit/>
+          </a:bodyPr>
+          <a:lstStyle/>
+          <a:p>
+            <a:pPr algn="l"/>
+            <a:r>
+              <a:rPr sz="1000" b="0" i="0">
+                <a:solidFill>
+                  <a:srgbClr val="868E96"/>
+                </a:solidFill>
+                <a:latin typeface="Calibri"/>
+              </a:rPr>
+              <a:t>Laboratório de Estresse Semântico</a:t>
+            </a:r>
+          </a:p>
+        </p:txBody>
+      </p:sp>
+      <p:sp>
+        <p:nvSpPr>
+          <p:cNvPr id="12" name="TextBox 12"/>
+          <p:cNvSpPr txBox="1"/>
+          <p:nvPr/>
+        </p:nvSpPr>
+        <p:spPr>
+          <a:xfrm>
+            <a:off x="10637215" y="6400800"/>
+            <a:ext cx="914400" cy="320040"/>
+          </a:xfrm>
+          <a:prstGeom prst="rect">
+            <a:avLst/>
+          </a:prstGeom>
+          <a:noFill/>
+        </p:spPr>
+        <p:txBody>
+          <a:bodyPr wrap="square" lIns="0" rIns="0" tIns="0" bIns="0">
+            <a:spAutoFit/>
+          </a:bodyPr>
+          <a:lstStyle/>
+          <a:p>
+            <a:pPr algn="r"/>
+            <a:r>
+              <a:rPr sz="1000" b="0" i="0">
+                <a:solidFill>
+                  <a:srgbClr val="868E96"/>
+                </a:solidFill>
+                <a:latin typeface="Calibri"/>
+              </a:rPr>
+              <a:t>7</a:t>
+            </a:r>
+          </a:p>
+        </p:txBody>
+      </p:sp>
+    </p:spTree>
+  </p:cSld>
+  <p:clrMapOvr>
+    <a:masterClrMapping/>
+  </p:clrMapOvr>
+</p:sld>
+</file>
+
+<file path=ppt/slides/slide11.xml><?xml version="1.0" encoding="utf-8"?>
+<p:sld xmlns:a="http://schemas.openxmlformats.org/drawingml/2006/main" xmlns:p="http://schemas.openxmlformats.org/presentationml/2006/main" xmlns:r="http://schemas.openxmlformats.org/officeDocument/2006/relationships">
+  <p:cSld>
+    <p:bg>
+      <p:bgPr>
+        <a:solidFill>
+          <a:srgbClr val="FFFFFF"/>
+        </a:solidFill>
+        <a:effectLst/>
+      </p:bgPr>
+    </p:bg>
+    <p:spTree>
+      <p:nvGrpSpPr>
+        <p:cNvPr id="1" name=""/>
+        <p:cNvGrpSpPr/>
+        <p:nvPr/>
+      </p:nvGrpSpPr>
+      <p:grpSpPr/>
+      <p:sp>
+        <p:nvSpPr>
+          <p:cNvPr id="2" name="TextBox 2"/>
+          <p:cNvSpPr txBox="1"/>
+          <p:nvPr/>
+        </p:nvSpPr>
+        <p:spPr>
+          <a:xfrm>
+            <a:off x="640080" y="411480"/>
+            <a:ext cx="10911535" cy="320040"/>
+          </a:xfrm>
+          <a:prstGeom prst="rect">
+            <a:avLst/>
+          </a:prstGeom>
+          <a:noFill/>
+        </p:spPr>
+        <p:txBody>
+          <a:bodyPr wrap="square" lIns="0" rIns="0" tIns="0" bIns="0">
+            <a:spAutoFit/>
+          </a:bodyPr>
+          <a:lstStyle/>
+          <a:p>
+            <a:pPr algn="l"/>
+            <a:r>
+              <a:rPr sz="1200" b="1" i="0">
+                <a:solidFill>
+                  <a:srgbClr val="3B5BDB"/>
+                </a:solidFill>
+                <a:latin typeface="Calibri"/>
+              </a:rPr>
+              <a:t>CONTROLE METODOLÓGICO</a:t>
+            </a:r>
+          </a:p>
+        </p:txBody>
+      </p:sp>
+      <p:sp>
+        <p:nvSpPr>
+          <p:cNvPr id="3" name="TextBox 3"/>
+          <p:cNvSpPr txBox="1"/>
+          <p:nvPr/>
+        </p:nvSpPr>
+        <p:spPr>
+          <a:xfrm>
+            <a:off x="640080" y="777240"/>
+            <a:ext cx="10911535" cy="731520"/>
+          </a:xfrm>
+          <a:prstGeom prst="rect">
+            <a:avLst/>
+          </a:prstGeom>
+          <a:noFill/>
+        </p:spPr>
+        <p:txBody>
+          <a:bodyPr wrap="square" lIns="0" rIns="0" tIns="0" bIns="0">
+            <a:spAutoFit/>
+          </a:bodyPr>
+          <a:lstStyle/>
+          <a:p>
+            <a:pPr algn="l"/>
+            <a:r>
+              <a:rPr sz="3000" b="1" i="0">
+                <a:solidFill>
+                  <a:srgbClr val="1B2A4A"/>
+                </a:solidFill>
+                <a:latin typeface="Calibri"/>
+              </a:rPr>
+              <a:t>Fenômeno retórico ou contexto perdido?</a:t>
+            </a:r>
+          </a:p>
+        </p:txBody>
+      </p:sp>
+      <p:sp>
+        <p:nvSpPr>
+          <p:cNvPr id="4" name="Rounded Rectangle 4"/>
+          <p:cNvSpPr/>
+          <p:nvPr/>
+        </p:nvSpPr>
+        <p:spPr>
+          <a:xfrm>
+            <a:off x="640080" y="1600200"/>
+            <a:ext cx="5212080" cy="3246120"/>
+          </a:xfrm>
+          <a:prstGeom prst="roundRect">
+            <a:avLst>
+              <a:gd name="adj" fmla="val 6000"/>
+            </a:avLst>
+          </a:prstGeom>
+          <a:solidFill>
+            <a:srgbClr val="F6F7F9"/>
+          </a:solidFill>
+          <a:ln>
+            <a:noFill/>
+          </a:ln>
+          <a:effectLst/>
+        </p:spPr>
+        <p:style>
+          <a:lnRef idx="1">
+            <a:schemeClr val="accent1"/>
+          </a:lnRef>
+          <a:fillRef idx="3">
+            <a:schemeClr val="accent1"/>
+          </a:fillRef>
+          <a:effectRef idx="2">
+            <a:schemeClr val="accent1"/>
+          </a:effectRef>
+          <a:fontRef idx="minor">
+            <a:schemeClr val="lt1"/>
+          </a:fontRef>
+        </p:style>
+        <p:txBody>
+          <a:bodyPr rtlCol="0" anchor="ctr"/>
+          <a:lstStyle/>
+          <a:p>
+            <a:pPr algn="ctr"/>
+          </a:p>
+        </p:txBody>
+      </p:sp>
+      <p:sp>
+        <p:nvSpPr>
+          <p:cNvPr id="5" name="Rounded Rectangle 5"/>
+          <p:cNvSpPr/>
+          <p:nvPr/>
+        </p:nvSpPr>
+        <p:spPr>
+          <a:xfrm>
+            <a:off x="914400" y="1856232"/>
+            <a:ext cx="3450000" cy="365760"/>
+          </a:xfrm>
+          <a:prstGeom prst="roundRect">
+            <a:avLst>
+              <a:gd name="adj" fmla="val 50000"/>
+            </a:avLst>
+          </a:prstGeom>
+          <a:solidFill>
+            <a:srgbClr val="FDECE0"/>
+          </a:solidFill>
+          <a:ln>
+            <a:noFill/>
+          </a:ln>
+          <a:effectLst/>
+        </p:spPr>
+        <p:style>
+          <a:lnRef idx="1">
+            <a:schemeClr val="accent1"/>
+          </a:lnRef>
+          <a:fillRef idx="3">
+            <a:schemeClr val="accent1"/>
+          </a:fillRef>
+          <a:effectRef idx="2">
+            <a:schemeClr val="accent1"/>
+          </a:effectRef>
+          <a:fontRef idx="minor">
+            <a:schemeClr val="lt1"/>
+          </a:fontRef>
+        </p:style>
+        <p:txBody>
+          <a:bodyPr rtlCol="0" anchor="ctr" wrap="square" lIns="228600" rIns="228600"/>
+          <a:lstStyle/>
+          <a:p>
+            <a:pPr algn="ctr"/>
+            <a:r>
+              <a:rPr sz="1200" b="1" i="0">
+                <a:solidFill>
+                  <a:srgbClr val="E8590C"/>
+                </a:solidFill>
+                <a:latin typeface="Calibri"/>
+              </a:rPr>
+              <a:t>PRECISA DE CONTEXTO PRÉVIO</a:t>
+            </a:r>
+          </a:p>
+        </p:txBody>
+      </p:sp>
+      <p:sp>
+        <p:nvSpPr>
+          <p:cNvPr id="6" name="TextBox 6"/>
+          <p:cNvSpPr txBox="1"/>
+          <p:nvPr/>
+        </p:nvSpPr>
+        <p:spPr>
+          <a:xfrm>
+            <a:off x="914400" y="2331720"/>
+            <a:ext cx="4663440" cy="365760"/>
+          </a:xfrm>
+          <a:prstGeom prst="rect">
+            <a:avLst/>
+          </a:prstGeom>
+          <a:noFill/>
+        </p:spPr>
+        <p:txBody>
+          <a:bodyPr wrap="square" lIns="0" rIns="0" tIns="0" bIns="0">
+            <a:spAutoFit/>
+          </a:bodyPr>
+          <a:lstStyle/>
+          <a:p>
+            <a:pPr algn="l"/>
+            <a:r>
+              <a:rPr sz="1450" b="1" i="0">
+                <a:solidFill>
+                  <a:srgbClr val="1B2A4A"/>
+                </a:solidFill>
+                <a:latin typeface="Calibri"/>
+              </a:rPr>
+              <a:t>6 de 12 pares do piloto</a:t>
+            </a:r>
+          </a:p>
+        </p:txBody>
+      </p:sp>
+      <p:sp>
+        <p:nvSpPr>
+          <p:cNvPr id="7" name="TextBox 7"/>
+          <p:cNvSpPr txBox="1"/>
+          <p:nvPr/>
+        </p:nvSpPr>
+        <p:spPr>
+          <a:xfrm>
+            <a:off x="914400" y="2770632"/>
+            <a:ext cx="4663440" cy="777240"/>
+          </a:xfrm>
+          <a:prstGeom prst="rect">
+            <a:avLst/>
+          </a:prstGeom>
+          <a:noFill/>
+        </p:spPr>
+        <p:txBody>
+          <a:bodyPr wrap="square" lIns="0" rIns="0" tIns="0" bIns="0">
+            <a:spAutoFit/>
+          </a:bodyPr>
+          <a:lstStyle/>
+          <a:p>
+            <a:pPr algn="l">
+              <a:lnSpc>
+                <a:spcPct val="110000"/>
+              </a:lnSpc>
+            </a:pPr>
+            <a:r>
+              <a:rPr sz="1200" b="0" i="1">
+                <a:solidFill>
+                  <a:srgbClr val="495057"/>
+                </a:solidFill>
+                <a:latin typeface="Calibri"/>
+              </a:rPr>
+              <a:t>Ex.: “Mas ainda...” (Vieira), apóstrofe a “tu, feto esquecido” (Anjos), elisão “(...)” (Andrade)</a:t>
+            </a:r>
+          </a:p>
+        </p:txBody>
+      </p:sp>
+      <p:sp>
+        <p:nvSpPr>
+          <p:cNvPr id="8" name="TextBox 8"/>
+          <p:cNvSpPr txBox="1"/>
+          <p:nvPr/>
+        </p:nvSpPr>
+        <p:spPr>
+          <a:xfrm>
+            <a:off x="914400" y="3593592"/>
+            <a:ext cx="4663440" cy="548640"/>
+          </a:xfrm>
+          <a:prstGeom prst="rect">
+            <a:avLst/>
+          </a:prstGeom>
+          <a:noFill/>
+        </p:spPr>
+        <p:txBody>
+          <a:bodyPr wrap="square" lIns="0" rIns="0" tIns="0" bIns="0">
+            <a:spAutoFit/>
+          </a:bodyPr>
+          <a:lstStyle/>
+          <a:p>
+            <a:pPr algn="l">
+              <a:lnSpc>
+                <a:spcPct val="110000"/>
+              </a:lnSpc>
+            </a:pPr>
+            <a:r>
+              <a:rPr sz="1200" b="0" i="0">
+                <a:solidFill>
+                  <a:srgbClr val="495057"/>
+                </a:solidFill>
+                <a:latin typeface="Calibri"/>
+              </a:rPr>
+              <a:t>→ conectivo, dêixis ou apóstrofe sem antecedente dentro do trecho</a:t>
+            </a:r>
+          </a:p>
+        </p:txBody>
+      </p:sp>
+      <p:sp>
+        <p:nvSpPr>
+          <p:cNvPr id="9" name="Rounded Rectangle 9"/>
+          <p:cNvSpPr/>
+          <p:nvPr/>
+        </p:nvSpPr>
+        <p:spPr>
+          <a:xfrm>
+            <a:off x="914400" y="4297680"/>
+            <a:ext cx="4663440" cy="256032"/>
+          </a:xfrm>
+          <a:prstGeom prst="roundRect">
+            <a:avLst>
+              <a:gd name="adj" fmla="val 50000"/>
+            </a:avLst>
+          </a:prstGeom>
+          <a:solidFill>
+            <a:srgbClr val="E9ECEF"/>
+          </a:solidFill>
+          <a:ln>
+            <a:noFill/>
+          </a:ln>
+          <a:effectLst/>
+        </p:spPr>
+        <p:style>
+          <a:lnRef idx="1">
+            <a:schemeClr val="accent1"/>
+          </a:lnRef>
+          <a:fillRef idx="3">
+            <a:schemeClr val="accent1"/>
+          </a:fillRef>
+          <a:effectRef idx="2">
+            <a:schemeClr val="accent1"/>
+          </a:effectRef>
+          <a:fontRef idx="minor">
+            <a:schemeClr val="lt1"/>
+          </a:fontRef>
+        </p:style>
+        <p:txBody>
+          <a:bodyPr rtlCol="0" anchor="ctr"/>
+          <a:lstStyle/>
+          <a:p>
+            <a:pPr algn="ctr"/>
+          </a:p>
+        </p:txBody>
+      </p:sp>
+      <p:sp>
+        <p:nvSpPr>
+          <p:cNvPr id="10" name="Rounded Rectangle 10"/>
+          <p:cNvSpPr/>
+          <p:nvPr/>
+        </p:nvSpPr>
+        <p:spPr>
+          <a:xfrm>
+            <a:off x="914400" y="4297680"/>
+            <a:ext cx="2665524" cy="256032"/>
+          </a:xfrm>
+          <a:prstGeom prst="roundRect">
+            <a:avLst>
+              <a:gd name="adj" fmla="val 50000"/>
+            </a:avLst>
+          </a:prstGeom>
+          <a:solidFill>
+            <a:srgbClr val="E8590C"/>
+          </a:solidFill>
+          <a:ln>
+            <a:noFill/>
+          </a:ln>
+          <a:effectLst/>
+        </p:spPr>
+        <p:style>
+          <a:lnRef idx="1">
+            <a:schemeClr val="accent1"/>
+          </a:lnRef>
+          <a:fillRef idx="3">
+            <a:schemeClr val="accent1"/>
+          </a:fillRef>
+          <a:effectRef idx="2">
+            <a:schemeClr val="accent1"/>
+          </a:effectRef>
+          <a:fontRef idx="minor">
+            <a:schemeClr val="lt1"/>
+          </a:fontRef>
+        </p:style>
+        <p:txBody>
+          <a:bodyPr rtlCol="0" anchor="ctr"/>
+          <a:lstStyle/>
+          <a:p>
+            <a:pPr algn="ctr"/>
+          </a:p>
+        </p:txBody>
+      </p:sp>
+      <p:sp>
+        <p:nvSpPr>
+          <p:cNvPr id="11" name="TextBox 11"/>
+          <p:cNvSpPr txBox="1"/>
+          <p:nvPr/>
+        </p:nvSpPr>
+        <p:spPr>
+          <a:xfrm>
+            <a:off x="914400" y="4590288"/>
+            <a:ext cx="4663440" cy="274320"/>
+          </a:xfrm>
+          <a:prstGeom prst="rect">
+            <a:avLst/>
+          </a:prstGeom>
+          <a:noFill/>
+        </p:spPr>
+        <p:txBody>
+          <a:bodyPr wrap="square" lIns="0" rIns="0" tIns="0" bIns="0">
+            <a:spAutoFit/>
+          </a:bodyPr>
+          <a:lstStyle/>
+          <a:p>
+            <a:pPr algn="l"/>
+            <a:r>
+              <a:rPr sz="1250" b="1" i="0">
+                <a:solidFill>
+                  <a:srgbClr val="E8590C"/>
+                </a:solidFill>
+                <a:latin typeface="Calibri"/>
+              </a:rPr>
+              <a:t>similaridade média ≈ 0,57</a:t>
+            </a:r>
+          </a:p>
+        </p:txBody>
+      </p:sp>
+      <p:sp>
+        <p:nvSpPr>
+          <p:cNvPr id="12" name="Rounded Rectangle 12"/>
+          <p:cNvSpPr/>
+          <p:nvPr/>
+        </p:nvSpPr>
+        <p:spPr>
+          <a:xfrm>
+            <a:off x="6309360" y="1600200"/>
+            <a:ext cx="5212080" cy="3246120"/>
+          </a:xfrm>
+          <a:prstGeom prst="roundRect">
+            <a:avLst>
+              <a:gd name="adj" fmla="val 6000"/>
+            </a:avLst>
+          </a:prstGeom>
+          <a:solidFill>
+            <a:srgbClr val="F6F7F9"/>
+          </a:solidFill>
+          <a:ln>
+            <a:noFill/>
+          </a:ln>
+          <a:effectLst/>
+        </p:spPr>
+        <p:style>
+          <a:lnRef idx="1">
+            <a:schemeClr val="accent1"/>
+          </a:lnRef>
+          <a:fillRef idx="3">
+            <a:schemeClr val="accent1"/>
+          </a:fillRef>
+          <a:effectRef idx="2">
+            <a:schemeClr val="accent1"/>
+          </a:effectRef>
+          <a:fontRef idx="minor">
+            <a:schemeClr val="lt1"/>
+          </a:fontRef>
+        </p:style>
+        <p:txBody>
+          <a:bodyPr rtlCol="0" anchor="ctr"/>
+          <a:lstStyle/>
+          <a:p>
+            <a:pPr algn="ctr"/>
+          </a:p>
+        </p:txBody>
+      </p:sp>
+      <p:sp>
+        <p:nvSpPr>
+          <p:cNvPr id="13" name="Rounded Rectangle 13"/>
+          <p:cNvSpPr/>
+          <p:nvPr/>
+        </p:nvSpPr>
+        <p:spPr>
+          <a:xfrm>
+            <a:off x="6583680" y="1856232"/>
+            <a:ext cx="1900000" cy="365760"/>
+          </a:xfrm>
+          <a:prstGeom prst="roundRect">
+            <a:avLst>
+              <a:gd name="adj" fmla="val 50000"/>
+            </a:avLst>
+          </a:prstGeom>
+          <a:solidFill>
+            <a:srgbClr val="DFF6EE"/>
+          </a:solidFill>
+          <a:ln>
+            <a:noFill/>
+          </a:ln>
+          <a:effectLst/>
+        </p:spPr>
+        <p:style>
+          <a:lnRef idx="1">
+            <a:schemeClr val="accent1"/>
+          </a:lnRef>
+          <a:fillRef idx="3">
+            <a:schemeClr val="accent1"/>
+          </a:fillRef>
+          <a:effectRef idx="2">
+            <a:schemeClr val="accent1"/>
+          </a:effectRef>
+          <a:fontRef idx="minor">
+            <a:schemeClr val="lt1"/>
+          </a:fontRef>
+        </p:style>
+        <p:txBody>
+          <a:bodyPr rtlCol="0" anchor="ctr" wrap="square" lIns="228600" rIns="228600"/>
+          <a:lstStyle/>
+          <a:p>
+            <a:pPr algn="ctr"/>
+            <a:r>
+              <a:rPr sz="1200" b="1" i="0">
+                <a:solidFill>
+                  <a:srgbClr val="0CA678"/>
+                </a:solidFill>
+                <a:latin typeface="Calibri"/>
+              </a:rPr>
+              <a:t>AUTOCONTIDO</a:t>
+            </a:r>
+          </a:p>
+        </p:txBody>
+      </p:sp>
+      <p:sp>
+        <p:nvSpPr>
+          <p:cNvPr id="14" name="TextBox 14"/>
+          <p:cNvSpPr txBox="1"/>
+          <p:nvPr/>
+        </p:nvSpPr>
+        <p:spPr>
+          <a:xfrm>
+            <a:off x="6583680" y="2331720"/>
+            <a:ext cx="4663440" cy="365760"/>
+          </a:xfrm>
+          <a:prstGeom prst="rect">
+            <a:avLst/>
+          </a:prstGeom>
+          <a:noFill/>
+        </p:spPr>
+        <p:txBody>
+          <a:bodyPr wrap="square" lIns="0" rIns="0" tIns="0" bIns="0">
+            <a:spAutoFit/>
+          </a:bodyPr>
+          <a:lstStyle/>
+          <a:p>
+            <a:pPr algn="l"/>
+            <a:r>
+              <a:rPr sz="1450" b="1" i="0">
+                <a:solidFill>
+                  <a:srgbClr val="1B2A4A"/>
+                </a:solidFill>
+                <a:latin typeface="Calibri"/>
+              </a:rPr>
+              <a:t>6 de 12 pares do piloto</a:t>
+            </a:r>
+          </a:p>
+        </p:txBody>
+      </p:sp>
+      <p:sp>
+        <p:nvSpPr>
+          <p:cNvPr id="15" name="TextBox 15"/>
+          <p:cNvSpPr txBox="1"/>
+          <p:nvPr/>
+        </p:nvSpPr>
+        <p:spPr>
+          <a:xfrm>
+            <a:off x="6583680" y="2770632"/>
+            <a:ext cx="4663440" cy="777240"/>
+          </a:xfrm>
+          <a:prstGeom prst="rect">
+            <a:avLst/>
+          </a:prstGeom>
+          <a:noFill/>
+        </p:spPr>
+        <p:txBody>
+          <a:bodyPr wrap="square" lIns="0" rIns="0" tIns="0" bIns="0">
+            <a:spAutoFit/>
+          </a:bodyPr>
+          <a:lstStyle/>
+          <a:p>
+            <a:pPr algn="l">
+              <a:lnSpc>
+                <a:spcPct val="110000"/>
+              </a:lnSpc>
+            </a:pPr>
+            <a:r>
+              <a:rPr sz="1200" b="0" i="1">
+                <a:solidFill>
+                  <a:srgbClr val="495057"/>
+                </a:solidFill>
+                <a:latin typeface="Calibri"/>
+              </a:rPr>
+              <a:t>Ex.: Rubião (Assis), Miranda (Azevedo), Macunaíma (Andrade)</a:t>
+            </a:r>
+          </a:p>
+        </p:txBody>
+      </p:sp>
+      <p:sp>
+        <p:nvSpPr>
+          <p:cNvPr id="16" name="TextBox 16"/>
+          <p:cNvSpPr txBox="1"/>
+          <p:nvPr/>
+        </p:nvSpPr>
+        <p:spPr>
+          <a:xfrm>
+            <a:off x="6583680" y="3593592"/>
+            <a:ext cx="4663440" cy="548640"/>
+          </a:xfrm>
+          <a:prstGeom prst="rect">
+            <a:avLst/>
+          </a:prstGeom>
+          <a:noFill/>
+        </p:spPr>
+        <p:txBody>
+          <a:bodyPr wrap="square" lIns="0" rIns="0" tIns="0" bIns="0">
+            <a:spAutoFit/>
+          </a:bodyPr>
+          <a:lstStyle/>
+          <a:p>
+            <a:pPr algn="l">
+              <a:lnSpc>
+                <a:spcPct val="110000"/>
+              </a:lnSpc>
+            </a:pPr>
+            <a:r>
+              <a:rPr sz="1200" b="0" i="0">
+                <a:solidFill>
+                  <a:srgbClr val="495057"/>
+                </a:solidFill>
+                <a:latin typeface="Calibri"/>
+              </a:rPr>
+              <a:t>→ personagem e cena descritos dentro da própria frase</a:t>
+            </a:r>
+          </a:p>
+        </p:txBody>
+      </p:sp>
+      <p:sp>
+        <p:nvSpPr>
+          <p:cNvPr id="17" name="Rounded Rectangle 17"/>
+          <p:cNvSpPr/>
+          <p:nvPr/>
+        </p:nvSpPr>
+        <p:spPr>
+          <a:xfrm>
+            <a:off x="6583680" y="4297680"/>
+            <a:ext cx="4663440" cy="256032"/>
+          </a:xfrm>
+          <a:prstGeom prst="roundRect">
+            <a:avLst>
+              <a:gd name="adj" fmla="val 50000"/>
+            </a:avLst>
+          </a:prstGeom>
+          <a:solidFill>
+            <a:srgbClr val="E9ECEF"/>
+          </a:solidFill>
+          <a:ln>
+            <a:noFill/>
+          </a:ln>
+          <a:effectLst/>
+        </p:spPr>
+        <p:style>
+          <a:lnRef idx="1">
+            <a:schemeClr val="accent1"/>
+          </a:lnRef>
+          <a:fillRef idx="3">
+            <a:schemeClr val="accent1"/>
+          </a:fillRef>
+          <a:effectRef idx="2">
+            <a:schemeClr val="accent1"/>
+          </a:effectRef>
+          <a:fontRef idx="minor">
+            <a:schemeClr val="lt1"/>
+          </a:fontRef>
+        </p:style>
+        <p:txBody>
+          <a:bodyPr rtlCol="0" anchor="ctr"/>
+          <a:lstStyle/>
+          <a:p>
+            <a:pPr algn="ctr"/>
+          </a:p>
+        </p:txBody>
+      </p:sp>
+      <p:sp>
+        <p:nvSpPr>
+          <p:cNvPr id="18" name="Rounded Rectangle 18"/>
+          <p:cNvSpPr/>
+          <p:nvPr/>
+        </p:nvSpPr>
+        <p:spPr>
+          <a:xfrm>
+            <a:off x="6583680" y="4297680"/>
+            <a:ext cx="3421309" cy="256032"/>
+          </a:xfrm>
+          <a:prstGeom prst="roundRect">
+            <a:avLst>
+              <a:gd name="adj" fmla="val 50000"/>
+            </a:avLst>
+          </a:prstGeom>
+          <a:solidFill>
+            <a:srgbClr val="0CA678"/>
+          </a:solidFill>
+          <a:ln>
+            <a:noFill/>
+          </a:ln>
+          <a:effectLst/>
+        </p:spPr>
+        <p:style>
+          <a:lnRef idx="1">
+            <a:schemeClr val="accent1"/>
+          </a:lnRef>
+          <a:fillRef idx="3">
+            <a:schemeClr val="accent1"/>
+          </a:fillRef>
+          <a:effectRef idx="2">
+            <a:schemeClr val="accent1"/>
+          </a:effectRef>
+          <a:fontRef idx="minor">
+            <a:schemeClr val="lt1"/>
+          </a:fontRef>
+        </p:style>
+        <p:txBody>
+          <a:bodyPr rtlCol="0" anchor="ctr"/>
+          <a:lstStyle/>
+          <a:p>
+            <a:pPr algn="ctr"/>
+          </a:p>
+        </p:txBody>
+      </p:sp>
+      <p:sp>
+        <p:nvSpPr>
+          <p:cNvPr id="19" name="TextBox 19"/>
+          <p:cNvSpPr txBox="1"/>
+          <p:nvPr/>
+        </p:nvSpPr>
+        <p:spPr>
+          <a:xfrm>
+            <a:off x="6583680" y="4590288"/>
+            <a:ext cx="4663440" cy="274320"/>
+          </a:xfrm>
+          <a:prstGeom prst="rect">
+            <a:avLst/>
+          </a:prstGeom>
+          <a:noFill/>
+        </p:spPr>
+        <p:txBody>
+          <a:bodyPr wrap="square" lIns="0" rIns="0" tIns="0" bIns="0">
+            <a:spAutoFit/>
+          </a:bodyPr>
+          <a:lstStyle/>
+          <a:p>
+            <a:pPr algn="l"/>
+            <a:r>
+              <a:rPr sz="1250" b="1" i="0">
+                <a:solidFill>
+                  <a:srgbClr val="0CA678"/>
+                </a:solidFill>
+                <a:latin typeface="Calibri"/>
+              </a:rPr>
+              <a:t>similaridade média ≈ 0,73</a:t>
+            </a:r>
+          </a:p>
+        </p:txBody>
+      </p:sp>
+      <p:sp>
+        <p:nvSpPr>
+          <p:cNvPr id="20" name="Rounded Rectangle 20"/>
+          <p:cNvSpPr/>
+          <p:nvPr/>
+        </p:nvSpPr>
+        <p:spPr>
+          <a:xfrm>
+            <a:off x="640080" y="5532120"/>
+            <a:ext cx="10911535" cy="777240"/>
+          </a:xfrm>
+          <a:prstGeom prst="roundRect">
+            <a:avLst>
+              <a:gd name="adj" fmla="val 10000"/>
+            </a:avLst>
+          </a:prstGeom>
+          <a:solidFill>
+            <a:srgbClr val="E7ECFC"/>
+          </a:solidFill>
+          <a:ln>
+            <a:noFill/>
+          </a:ln>
+          <a:effectLst/>
+        </p:spPr>
+        <p:style>
+          <a:lnRef idx="1">
+            <a:schemeClr val="accent1"/>
+          </a:lnRef>
+          <a:fillRef idx="3">
+            <a:schemeClr val="accent1"/>
+          </a:fillRef>
+          <a:effectRef idx="2">
+            <a:schemeClr val="accent1"/>
+          </a:effectRef>
+          <a:fontRef idx="minor">
+            <a:schemeClr val="lt1"/>
+          </a:fontRef>
+        </p:style>
+        <p:txBody>
+          <a:bodyPr rtlCol="0" anchor="ctr" wrap="square" lIns="320040" rIns="320040"/>
+          <a:lstStyle/>
+          <a:p>
+            <a:pPr algn="l">
+              <a:lnSpc>
+                <a:spcPct val="115000"/>
+              </a:lnSpc>
+            </a:pPr>
+            <a:r>
+              <a:rPr sz="1300" b="0" i="1">
+                <a:solidFill>
+                  <a:srgbClr val="1B2A4A"/>
+                </a:solidFill>
+                <a:latin typeface="Calibri"/>
+              </a:rPr>
+              <a:t>5 dos 6 pares “Lógico-pragmática” (Seção 6) também precisam de contexto prévio, contra 1 dos 5 “Lexical/Retórica” — os dois fatores estão praticamente confundidos neste piloto (Mann-Whitney p ≈ 0,004). Ainda não dá para saber se é o fenômeno ou o contexto perdido que reduz a similaridade.</a:t>
+            </a:r>
+          </a:p>
+        </p:txBody>
+      </p:sp>
+      <p:sp>
+        <p:nvSpPr>
+          <p:cNvPr id="21" name="TextBox 21"/>
+          <p:cNvSpPr txBox="1"/>
+          <p:nvPr/>
+        </p:nvSpPr>
+        <p:spPr>
+          <a:xfrm>
+            <a:off x="640080" y="6400800"/>
+            <a:ext cx="5486400" cy="320040"/>
+          </a:xfrm>
+          <a:prstGeom prst="rect">
+            <a:avLst/>
+          </a:prstGeom>
+          <a:noFill/>
+        </p:spPr>
+        <p:txBody>
+          <a:bodyPr wrap="square" lIns="0" rIns="0" tIns="0" bIns="0">
+            <a:spAutoFit/>
+          </a:bodyPr>
+          <a:lstStyle/>
+          <a:p>
+            <a:pPr algn="l"/>
+            <a:r>
+              <a:rPr sz="1000" b="0" i="0">
+                <a:solidFill>
+                  <a:srgbClr val="868E96"/>
+                </a:solidFill>
+                <a:latin typeface="Calibri"/>
+              </a:rPr>
+              <a:t>Laboratório de Estresse Semântico</a:t>
+            </a:r>
+          </a:p>
+        </p:txBody>
+      </p:sp>
+      <p:sp>
+        <p:nvSpPr>
+          <p:cNvPr id="22" name="TextBox 22"/>
+          <p:cNvSpPr txBox="1"/>
+          <p:nvPr/>
+        </p:nvSpPr>
+        <p:spPr>
+          <a:xfrm>
+            <a:off x="10637215" y="6400800"/>
+            <a:ext cx="914400" cy="320040"/>
+          </a:xfrm>
+          <a:prstGeom prst="rect">
+            <a:avLst/>
+          </a:prstGeom>
+          <a:noFill/>
+        </p:spPr>
+        <p:txBody>
+          <a:bodyPr wrap="square" lIns="0" rIns="0" tIns="0" bIns="0">
+            <a:spAutoFit/>
+          </a:bodyPr>
+          <a:lstStyle/>
+          <a:p>
+            <a:pPr algn="r"/>
+            <a:r>
+              <a:rPr sz="1000" b="0" i="0">
+                <a:solidFill>
+                  <a:srgbClr val="868E96"/>
+                </a:solidFill>
+                <a:latin typeface="Calibri"/>
+              </a:rPr>
+              <a:t>10</a:t>
+            </a:r>
+          </a:p>
+        </p:txBody>
+      </p:sp>
+    </p:spTree>
+  </p:cSld>
+  <p:clrMapOvr>
+    <a:masterClrMapping/>
+  </p:clrMapOvr>
+</p:sld>
+</file>
+
+<file path=ppt/slides/slide12.xml><?xml version="1.0" encoding="utf-8"?>
+<p:sld xmlns:a="http://schemas.openxmlformats.org/drawingml/2006/main" xmlns:p="http://schemas.openxmlformats.org/presentationml/2006/main" xmlns:r="http://schemas.openxmlformats.org/officeDocument/2006/relationships">
+  <p:cSld>
+    <p:bg>
+      <p:bgPr>
+        <a:solidFill>
+          <a:srgbClr val="FFFFFF"/>
+        </a:solidFill>
+        <a:effectLst/>
+      </p:bgPr>
+    </p:bg>
+    <p:spTree>
+      <p:nvGrpSpPr>
+        <p:cNvPr id="1" name=""/>
+        <p:cNvGrpSpPr/>
+        <p:nvPr/>
+      </p:nvGrpSpPr>
+      <p:grpSpPr/>
+      <p:sp>
+        <p:nvSpPr>
+          <p:cNvPr id="2" name="TextBox 23"/>
+          <p:cNvSpPr txBox="1"/>
+          <p:nvPr/>
+        </p:nvSpPr>
+        <p:spPr>
+          <a:xfrm>
+            <a:off x="640080" y="411480"/>
+            <a:ext cx="10911535" cy="320040"/>
+          </a:xfrm>
+          <a:prstGeom prst="rect">
+            <a:avLst/>
+          </a:prstGeom>
+          <a:noFill/>
+        </p:spPr>
+        <p:txBody>
+          <a:bodyPr wrap="square" lIns="0" rIns="0" tIns="0" bIns="0">
+            <a:spAutoFit/>
+          </a:bodyPr>
+          <a:lstStyle/>
+          <a:p>
+            <a:pPr algn="l"/>
+            <a:r>
+              <a:rPr sz="1200" b="1" i="0">
+                <a:solidFill>
+                  <a:srgbClr val="3B5BDB"/>
+                </a:solidFill>
+                <a:latin typeface="Calibri"/>
+              </a:rPr>
+              <a:t>ATUALIZAÇÃO (n=25)</a:t>
+            </a:r>
+          </a:p>
+        </p:txBody>
+      </p:sp>
+      <p:sp>
+        <p:nvSpPr>
+          <p:cNvPr id="3" name="TextBox 24"/>
+          <p:cNvSpPr txBox="1"/>
+          <p:nvPr/>
+        </p:nvSpPr>
+        <p:spPr>
+          <a:xfrm>
+            <a:off x="640080" y="777240"/>
+            <a:ext cx="10911535" cy="731520"/>
+          </a:xfrm>
+          <a:prstGeom prst="rect">
+            <a:avLst/>
+          </a:prstGeom>
+          <a:noFill/>
+        </p:spPr>
+        <p:txBody>
+          <a:bodyPr wrap="square" lIns="0" rIns="0" tIns="0" bIns="0">
+            <a:spAutoFit/>
+          </a:bodyPr>
+          <a:lstStyle/>
+          <a:p>
+            <a:pPr algn="l"/>
+            <a:r>
+              <a:rPr sz="3000" b="1" i="0">
+                <a:solidFill>
+                  <a:srgbClr val="1B2A4A"/>
+                </a:solidFill>
+                <a:latin typeface="Calibri"/>
+              </a:rPr>
+              <a:t>A hierarquia “Paradoxo pior” não se sustentou</a:t>
+            </a:r>
+          </a:p>
+        </p:txBody>
+      </p:sp>
+      <p:sp>
+        <p:nvSpPr>
+          <p:cNvPr id="4" name="Rounded Rectangle 4"/>
+          <p:cNvSpPr/>
+          <p:nvPr/>
+        </p:nvSpPr>
+        <p:spPr>
+          <a:xfrm>
+            <a:off x="640080" y="1600200"/>
+            <a:ext cx="5212080" cy="3246120"/>
+          </a:xfrm>
+          <a:prstGeom prst="roundRect">
+            <a:avLst>
+              <a:gd name="adj" fmla="val 6000"/>
+            </a:avLst>
+          </a:prstGeom>
+          <a:solidFill>
+            <a:srgbClr val="F6F7F9"/>
+          </a:solidFill>
+          <a:ln>
+            <a:noFill/>
+          </a:ln>
+          <a:effectLst/>
+        </p:spPr>
+        <p:style>
+          <a:lnRef idx="1">
+            <a:schemeClr val="accent1"/>
+          </a:lnRef>
+          <a:fillRef idx="3">
+            <a:schemeClr val="accent1"/>
+          </a:fillRef>
+          <a:effectRef idx="2">
+            <a:schemeClr val="accent1"/>
+          </a:effectRef>
+          <a:fontRef idx="minor">
+            <a:schemeClr val="lt1"/>
+          </a:fontRef>
+        </p:style>
+        <p:txBody>
+          <a:bodyPr rtlCol="0" anchor="ctr"/>
+          <a:lstStyle/>
+          <a:p>
+            <a:pPr algn="ctr"/>
+          </a:p>
+        </p:txBody>
+      </p:sp>
+      <p:sp>
+        <p:nvSpPr>
+          <p:cNvPr id="5" name="Rounded Rectangle 5"/>
+          <p:cNvSpPr/>
+          <p:nvPr/>
+        </p:nvSpPr>
+        <p:spPr>
+          <a:xfrm>
+            <a:off x="914400" y="1856232"/>
+            <a:ext cx="3450000" cy="365760"/>
+          </a:xfrm>
+          <a:prstGeom prst="roundRect">
+            <a:avLst>
+              <a:gd name="adj" fmla="val 50000"/>
+            </a:avLst>
+          </a:prstGeom>
+          <a:solidFill>
+            <a:srgbClr val="FDECE0"/>
+          </a:solidFill>
+          <a:ln>
+            <a:noFill/>
+          </a:ln>
+          <a:effectLst/>
+        </p:spPr>
+        <p:style>
+          <a:lnRef idx="1">
+            <a:schemeClr val="accent1"/>
+          </a:lnRef>
+          <a:fillRef idx="3">
+            <a:schemeClr val="accent1"/>
+          </a:fillRef>
+          <a:effectRef idx="2">
+            <a:schemeClr val="accent1"/>
+          </a:effectRef>
+          <a:fontRef idx="minor">
+            <a:schemeClr val="lt1"/>
+          </a:fontRef>
+        </p:style>
+        <p:txBody>
+          <a:bodyPr rtlCol="0" anchor="ctr" wrap="square" lIns="228600" rIns="228600"/>
+          <a:lstStyle/>
+          <a:p>
+            <a:pPr algn="ctr"/>
+            <a:r>
+              <a:rPr sz="1200" b="1" i="0">
+                <a:solidFill>
+                  <a:srgbClr val="E8590C"/>
+                </a:solidFill>
+                <a:latin typeface="Calibri"/>
+              </a:rPr>
+              <a:t>PARADOXO — SÓ n=1 (PILOTO)</a:t>
+            </a:r>
+          </a:p>
+        </p:txBody>
+      </p:sp>
+      <p:sp>
+        <p:nvSpPr>
+          <p:cNvPr id="6" name="TextBox 6"/>
+          <p:cNvSpPr txBox="1"/>
+          <p:nvPr/>
+        </p:nvSpPr>
+        <p:spPr>
+          <a:xfrm>
+            <a:off x="914400" y="2331720"/>
+            <a:ext cx="4663440" cy="365760"/>
+          </a:xfrm>
+          <a:prstGeom prst="rect">
+            <a:avLst/>
+          </a:prstGeom>
+          <a:noFill/>
+        </p:spPr>
+        <p:txBody>
+          <a:bodyPr wrap="square" lIns="0" rIns="0" tIns="0" bIns="0">
+            <a:spAutoFit/>
+          </a:bodyPr>
+          <a:lstStyle/>
+          <a:p>
+            <a:pPr algn="l"/>
+            <a:r>
+              <a:rPr sz="1450" b="1" i="0">
+                <a:solidFill>
+                  <a:srgbClr val="1B2A4A"/>
+                </a:solidFill>
+                <a:latin typeface="Calibri"/>
+              </a:rPr>
+              <a:t>vieira_002, o único par do piloto</a:t>
+            </a:r>
+          </a:p>
+        </p:txBody>
+      </p:sp>
+      <p:sp>
+        <p:nvSpPr>
+          <p:cNvPr id="7" name="TextBox 7"/>
+          <p:cNvSpPr txBox="1"/>
+          <p:nvPr/>
+        </p:nvSpPr>
+        <p:spPr>
+          <a:xfrm>
+            <a:off x="914400" y="2770632"/>
+            <a:ext cx="4663440" cy="777240"/>
+          </a:xfrm>
+          <a:prstGeom prst="rect">
+            <a:avLst/>
+          </a:prstGeom>
+          <a:noFill/>
+        </p:spPr>
+        <p:txBody>
+          <a:bodyPr wrap="square" lIns="0" rIns="0" tIns="0" bIns="0">
+            <a:spAutoFit/>
+          </a:bodyPr>
+          <a:lstStyle/>
+          <a:p>
+            <a:pPr algn="l">
+              <a:lnSpc>
+                <a:spcPct val="110000"/>
+              </a:lnSpc>
+            </a:pPr>
+            <a:r>
+              <a:rPr sz="1200" b="0" i="1">
+                <a:solidFill>
+                  <a:srgbClr val="495057"/>
+                </a:solidFill>
+                <a:latin typeface="Calibri"/>
+              </a:rPr>
+              <a:t>Ex.: “É uma arte sem arte, caia onde cair” (Vieira)</a:t>
+            </a:r>
+          </a:p>
+        </p:txBody>
+      </p:sp>
+      <p:sp>
+        <p:nvSpPr>
+          <p:cNvPr id="8" name="TextBox 8"/>
+          <p:cNvSpPr txBox="1"/>
+          <p:nvPr/>
+        </p:nvSpPr>
+        <p:spPr>
+          <a:xfrm>
+            <a:off x="914400" y="3593592"/>
+            <a:ext cx="4663440" cy="548640"/>
+          </a:xfrm>
+          <a:prstGeom prst="rect">
+            <a:avLst/>
+          </a:prstGeom>
+          <a:noFill/>
+        </p:spPr>
+        <p:txBody>
+          <a:bodyPr wrap="square" lIns="0" rIns="0" tIns="0" bIns="0">
+            <a:spAutoFit/>
+          </a:bodyPr>
+          <a:lstStyle/>
+          <a:p>
+            <a:pPr algn="l">
+              <a:lnSpc>
+                <a:spcPct val="110000"/>
+              </a:lnSpc>
+            </a:pPr>
+            <a:r>
+              <a:rPr sz="1200" b="0" i="0">
+                <a:solidFill>
+                  <a:srgbClr val="495057"/>
+                </a:solidFill>
+                <a:latin typeface="Calibri"/>
+              </a:rPr>
+              <a:t>→ parecia o fenômeno mais hostil aos embeddings do dataset</a:t>
+            </a:r>
+          </a:p>
+        </p:txBody>
+      </p:sp>
+      <p:sp>
+        <p:nvSpPr>
+          <p:cNvPr id="9" name="Rounded Rectangle 9"/>
+          <p:cNvSpPr/>
+          <p:nvPr/>
+        </p:nvSpPr>
+        <p:spPr>
+          <a:xfrm>
+            <a:off x="914400" y="4297680"/>
+            <a:ext cx="4663440" cy="256032"/>
+          </a:xfrm>
+          <a:prstGeom prst="roundRect">
+            <a:avLst>
+              <a:gd name="adj" fmla="val 50000"/>
+            </a:avLst>
+          </a:prstGeom>
+          <a:solidFill>
+            <a:srgbClr val="E9ECEF"/>
+          </a:solidFill>
+          <a:ln>
+            <a:noFill/>
+          </a:ln>
+          <a:effectLst/>
+        </p:spPr>
+        <p:style>
+          <a:lnRef idx="1">
+            <a:schemeClr val="accent1"/>
+          </a:lnRef>
+          <a:fillRef idx="3">
+            <a:schemeClr val="accent1"/>
+          </a:fillRef>
+          <a:effectRef idx="2">
+            <a:schemeClr val="accent1"/>
+          </a:effectRef>
+          <a:fontRef idx="minor">
+            <a:schemeClr val="lt1"/>
+          </a:fontRef>
+        </p:style>
+        <p:txBody>
+          <a:bodyPr rtlCol="0" anchor="ctr"/>
+          <a:lstStyle/>
+          <a:p>
+            <a:pPr algn="ctr"/>
+          </a:p>
+        </p:txBody>
+      </p:sp>
+      <p:sp>
+        <p:nvSpPr>
+          <p:cNvPr id="10" name="Rounded Rectangle 10"/>
+          <p:cNvSpPr/>
+          <p:nvPr/>
+        </p:nvSpPr>
+        <p:spPr>
+          <a:xfrm>
+            <a:off x="914400" y="4297680"/>
+            <a:ext cx="1818742" cy="256032"/>
+          </a:xfrm>
+          <a:prstGeom prst="roundRect">
+            <a:avLst>
+              <a:gd name="adj" fmla="val 50000"/>
+            </a:avLst>
+          </a:prstGeom>
+          <a:solidFill>
+            <a:srgbClr val="E8590C"/>
+          </a:solidFill>
+          <a:ln>
+            <a:noFill/>
+          </a:ln>
+          <a:effectLst/>
+        </p:spPr>
+        <p:style>
+          <a:lnRef idx="1">
+            <a:schemeClr val="accent1"/>
+          </a:lnRef>
+          <a:fillRef idx="3">
+            <a:schemeClr val="accent1"/>
+          </a:fillRef>
+          <a:effectRef idx="2">
+            <a:schemeClr val="accent1"/>
+          </a:effectRef>
+          <a:fontRef idx="minor">
+            <a:schemeClr val="lt1"/>
+          </a:fontRef>
+        </p:style>
+        <p:txBody>
+          <a:bodyPr rtlCol="0" anchor="ctr"/>
+          <a:lstStyle/>
+          <a:p>
+            <a:pPr algn="ctr"/>
+          </a:p>
+        </p:txBody>
+      </p:sp>
+      <p:sp>
+        <p:nvSpPr>
+          <p:cNvPr id="11" name="TextBox 11"/>
+          <p:cNvSpPr txBox="1"/>
+          <p:nvPr/>
+        </p:nvSpPr>
+        <p:spPr>
+          <a:xfrm>
+            <a:off x="914400" y="4590288"/>
+            <a:ext cx="4663440" cy="274320"/>
+          </a:xfrm>
+          <a:prstGeom prst="rect">
+            <a:avLst/>
+          </a:prstGeom>
+          <a:noFill/>
+        </p:spPr>
+        <p:txBody>
+          <a:bodyPr wrap="square" lIns="0" rIns="0" tIns="0" bIns="0">
+            <a:spAutoFit/>
+          </a:bodyPr>
+          <a:lstStyle/>
+          <a:p>
+            <a:pPr algn="l"/>
+            <a:r>
+              <a:rPr sz="1250" b="1" i="0">
+                <a:solidFill>
+                  <a:srgbClr val="E8590C"/>
+                </a:solidFill>
+                <a:latin typeface="Calibri"/>
+              </a:rPr>
+              <a:t>similaridade ≈ 0,39 (mínimo do piloto)</a:t>
+            </a:r>
+          </a:p>
+        </p:txBody>
+      </p:sp>
+      <p:sp>
+        <p:nvSpPr>
+          <p:cNvPr id="12" name="Rounded Rectangle 12"/>
+          <p:cNvSpPr/>
+          <p:nvPr/>
+        </p:nvSpPr>
+        <p:spPr>
+          <a:xfrm>
+            <a:off x="6309360" y="1600200"/>
+            <a:ext cx="5212080" cy="3246120"/>
+          </a:xfrm>
+          <a:prstGeom prst="roundRect">
+            <a:avLst>
+              <a:gd name="adj" fmla="val 6000"/>
+            </a:avLst>
+          </a:prstGeom>
+          <a:solidFill>
+            <a:srgbClr val="F6F7F9"/>
+          </a:solidFill>
+          <a:ln>
+            <a:noFill/>
+          </a:ln>
+          <a:effectLst/>
+        </p:spPr>
+        <p:style>
+          <a:lnRef idx="1">
+            <a:schemeClr val="accent1"/>
+          </a:lnRef>
+          <a:fillRef idx="3">
+            <a:schemeClr val="accent1"/>
+          </a:fillRef>
+          <a:effectRef idx="2">
+            <a:schemeClr val="accent1"/>
+          </a:effectRef>
+          <a:fontRef idx="minor">
+            <a:schemeClr val="lt1"/>
+          </a:fontRef>
+        </p:style>
+        <p:txBody>
+          <a:bodyPr rtlCol="0" anchor="ctr"/>
+          <a:lstStyle/>
+          <a:p>
+            <a:pPr algn="ctr"/>
+          </a:p>
+        </p:txBody>
+      </p:sp>
+      <p:sp>
+        <p:nvSpPr>
+          <p:cNvPr id="13" name="Rounded Rectangle 13"/>
+          <p:cNvSpPr/>
+          <p:nvPr/>
+        </p:nvSpPr>
+        <p:spPr>
+          <a:xfrm>
+            <a:off x="6583680" y="1856232"/>
+            <a:ext cx="1900000" cy="365760"/>
+          </a:xfrm>
+          <a:prstGeom prst="roundRect">
+            <a:avLst>
+              <a:gd name="adj" fmla="val 50000"/>
+            </a:avLst>
+          </a:prstGeom>
+          <a:solidFill>
+            <a:srgbClr val="DFF6EE"/>
+          </a:solidFill>
+          <a:ln>
+            <a:noFill/>
+          </a:ln>
+          <a:effectLst/>
+        </p:spPr>
+        <p:style>
+          <a:lnRef idx="1">
+            <a:schemeClr val="accent1"/>
+          </a:lnRef>
+          <a:fillRef idx="3">
+            <a:schemeClr val="accent1"/>
+          </a:fillRef>
+          <a:effectRef idx="2">
+            <a:schemeClr val="accent1"/>
+          </a:effectRef>
+          <a:fontRef idx="minor">
+            <a:schemeClr val="lt1"/>
+          </a:fontRef>
+        </p:style>
+        <p:txBody>
+          <a:bodyPr rtlCol="0" anchor="ctr" wrap="square" lIns="228600" rIns="228600"/>
+          <a:lstStyle/>
+          <a:p>
+            <a:pPr algn="ctr"/>
+            <a:r>
+              <a:rPr sz="1200" b="1" i="0">
+                <a:solidFill>
+                  <a:srgbClr val="0CA678"/>
+                </a:solidFill>
+                <a:latin typeface="Calibri"/>
+              </a:rPr>
+              <a:t>PARADOXO — AGORA n=4</a:t>
+            </a:r>
+          </a:p>
+        </p:txBody>
+      </p:sp>
+      <p:sp>
+        <p:nvSpPr>
+          <p:cNvPr id="14" name="TextBox 14"/>
+          <p:cNvSpPr txBox="1"/>
+          <p:nvPr/>
+        </p:nvSpPr>
+        <p:spPr>
+          <a:xfrm>
+            <a:off x="6583680" y="2331720"/>
+            <a:ext cx="4663440" cy="365760"/>
+          </a:xfrm>
+          <a:prstGeom prst="rect">
+            <a:avLst/>
+          </a:prstGeom>
+          <a:noFill/>
+        </p:spPr>
+        <p:txBody>
+          <a:bodyPr wrap="square" lIns="0" rIns="0" tIns="0" bIns="0">
+            <a:spAutoFit/>
+          </a:bodyPr>
+          <a:lstStyle/>
+          <a:p>
+            <a:pPr algn="l"/>
+            <a:r>
+              <a:rPr sz="1450" b="1" i="0">
+                <a:solidFill>
+                  <a:srgbClr val="1B2A4A"/>
+                </a:solidFill>
+                <a:latin typeface="Calibri"/>
+              </a:rPr>
+              <a:t>+ Camões e 2 sonetos de Gregório de Matos</a:t>
+            </a:r>
+          </a:p>
+        </p:txBody>
+      </p:sp>
+      <p:sp>
+        <p:nvSpPr>
+          <p:cNvPr id="15" name="TextBox 15"/>
+          <p:cNvSpPr txBox="1"/>
+          <p:nvPr/>
+        </p:nvSpPr>
+        <p:spPr>
+          <a:xfrm>
+            <a:off x="6583680" y="2770632"/>
+            <a:ext cx="4663440" cy="777240"/>
+          </a:xfrm>
+          <a:prstGeom prst="rect">
+            <a:avLst/>
+          </a:prstGeom>
+          <a:noFill/>
+        </p:spPr>
+        <p:txBody>
+          <a:bodyPr wrap="square" lIns="0" rIns="0" tIns="0" bIns="0">
+            <a:spAutoFit/>
+          </a:bodyPr>
+          <a:lstStyle/>
+          <a:p>
+            <a:pPr algn="l">
+              <a:lnSpc>
+                <a:spcPct val="110000"/>
+              </a:lnSpc>
+            </a:pPr>
+            <a:r>
+              <a:rPr sz="1200" b="0" i="1">
+                <a:solidFill>
+                  <a:srgbClr val="495057"/>
+                </a:solidFill>
+                <a:latin typeface="Calibri"/>
+              </a:rPr>
+              <a:t>Ex.: matos_001 chega a 0,89 — o maior valor do dataset inteiro</a:t>
+            </a:r>
+          </a:p>
+        </p:txBody>
+      </p:sp>
+      <p:sp>
+        <p:nvSpPr>
+          <p:cNvPr id="16" name="TextBox 16"/>
+          <p:cNvSpPr txBox="1"/>
+          <p:nvPr/>
+        </p:nvSpPr>
+        <p:spPr>
+          <a:xfrm>
+            <a:off x="6583680" y="3593592"/>
+            <a:ext cx="4663440" cy="548640"/>
+          </a:xfrm>
+          <a:prstGeom prst="rect">
+            <a:avLst/>
+          </a:prstGeom>
+          <a:noFill/>
+        </p:spPr>
+        <p:txBody>
+          <a:bodyPr wrap="square" lIns="0" rIns="0" tIns="0" bIns="0">
+            <a:spAutoFit/>
+          </a:bodyPr>
+          <a:lstStyle/>
+          <a:p>
+            <a:pPr algn="l">
+              <a:lnSpc>
+                <a:spcPct val="110000"/>
+              </a:lnSpc>
+            </a:pPr>
+            <a:r>
+              <a:rPr sz="1200" b="0" i="0">
+                <a:solidFill>
+                  <a:srgbClr val="495057"/>
+                </a:solidFill>
+                <a:latin typeface="Calibri"/>
+              </a:rPr>
+              <a:t>→ virou o fenômeno de MAIOR desvio padrão, não o de menor média</a:t>
+            </a:r>
+          </a:p>
+        </p:txBody>
+      </p:sp>
+      <p:sp>
+        <p:nvSpPr>
+          <p:cNvPr id="17" name="Rounded Rectangle 17"/>
+          <p:cNvSpPr/>
+          <p:nvPr/>
+        </p:nvSpPr>
+        <p:spPr>
+          <a:xfrm>
+            <a:off x="6583680" y="4297680"/>
+            <a:ext cx="4663440" cy="256032"/>
+          </a:xfrm>
+          <a:prstGeom prst="roundRect">
+            <a:avLst>
+              <a:gd name="adj" fmla="val 50000"/>
+            </a:avLst>
+          </a:prstGeom>
+          <a:solidFill>
+            <a:srgbClr val="E9ECEF"/>
+          </a:solidFill>
+          <a:ln>
+            <a:noFill/>
+          </a:ln>
+          <a:effectLst/>
+        </p:spPr>
+        <p:style>
+          <a:lnRef idx="1">
+            <a:schemeClr val="accent1"/>
+          </a:lnRef>
+          <a:fillRef idx="3">
+            <a:schemeClr val="accent1"/>
+          </a:fillRef>
+          <a:effectRef idx="2">
+            <a:schemeClr val="accent1"/>
+          </a:effectRef>
+          <a:fontRef idx="minor">
+            <a:schemeClr val="lt1"/>
+          </a:fontRef>
+        </p:style>
+        <p:txBody>
+          <a:bodyPr rtlCol="0" anchor="ctr"/>
+          <a:lstStyle/>
+          <a:p>
+            <a:pPr algn="ctr"/>
+          </a:p>
+        </p:txBody>
+      </p:sp>
+      <p:sp>
+        <p:nvSpPr>
+          <p:cNvPr id="18" name="Rounded Rectangle 18"/>
+          <p:cNvSpPr/>
+          <p:nvPr/>
+        </p:nvSpPr>
+        <p:spPr>
+          <a:xfrm>
+            <a:off x="6583680" y="4297680"/>
+            <a:ext cx="3684118" cy="256032"/>
+          </a:xfrm>
+          <a:prstGeom prst="roundRect">
+            <a:avLst>
+              <a:gd name="adj" fmla="val 50000"/>
+            </a:avLst>
+          </a:prstGeom>
+          <a:solidFill>
+            <a:srgbClr val="0CA678"/>
+          </a:solidFill>
+          <a:ln>
+            <a:noFill/>
+          </a:ln>
+          <a:effectLst/>
+        </p:spPr>
+        <p:style>
+          <a:lnRef idx="1">
+            <a:schemeClr val="accent1"/>
+          </a:lnRef>
+          <a:fillRef idx="3">
+            <a:schemeClr val="accent1"/>
+          </a:fillRef>
+          <a:effectRef idx="2">
+            <a:schemeClr val="accent1"/>
+          </a:effectRef>
+          <a:fontRef idx="minor">
+            <a:schemeClr val="lt1"/>
+          </a:fontRef>
+        </p:style>
+        <p:txBody>
+          <a:bodyPr rtlCol="0" anchor="ctr"/>
+          <a:lstStyle/>
+          <a:p>
+            <a:pPr algn="ctr"/>
+          </a:p>
+        </p:txBody>
+      </p:sp>
+      <p:sp>
+        <p:nvSpPr>
+          <p:cNvPr id="19" name="TextBox 19"/>
+          <p:cNvSpPr txBox="1"/>
+          <p:nvPr/>
+        </p:nvSpPr>
+        <p:spPr>
+          <a:xfrm>
+            <a:off x="6583680" y="4590288"/>
+            <a:ext cx="4663440" cy="274320"/>
+          </a:xfrm>
+          <a:prstGeom prst="rect">
+            <a:avLst/>
+          </a:prstGeom>
+          <a:noFill/>
+        </p:spPr>
+        <p:txBody>
+          <a:bodyPr wrap="square" lIns="0" rIns="0" tIns="0" bIns="0">
+            <a:spAutoFit/>
+          </a:bodyPr>
+          <a:lstStyle/>
+          <a:p>
+            <a:pPr algn="l"/>
+            <a:r>
+              <a:rPr sz="1250" b="1" i="0">
+                <a:solidFill>
+                  <a:srgbClr val="0CA678"/>
+                </a:solidFill>
+                <a:latin typeface="Calibri"/>
+              </a:rPr>
+              <a:t>similaridade média ≈ 0,79 (DP 0,19–0,28)</a:t>
+            </a:r>
+          </a:p>
+        </p:txBody>
+      </p:sp>
+      <p:sp>
+        <p:nvSpPr>
+          <p:cNvPr id="20" name="Rounded Rectangle 20"/>
+          <p:cNvSpPr/>
+          <p:nvPr/>
+        </p:nvSpPr>
+        <p:spPr>
+          <a:xfrm>
+            <a:off x="640080" y="5532120"/>
+            <a:ext cx="10911535" cy="777240"/>
+          </a:xfrm>
+          <a:prstGeom prst="roundRect">
+            <a:avLst>
+              <a:gd name="adj" fmla="val 10000"/>
+            </a:avLst>
+          </a:prstGeom>
+          <a:solidFill>
+            <a:srgbClr val="E7ECFC"/>
+          </a:solidFill>
+          <a:ln>
+            <a:noFill/>
+          </a:ln>
+          <a:effectLst/>
+        </p:spPr>
+        <p:style>
+          <a:lnRef idx="1">
+            <a:schemeClr val="accent1"/>
+          </a:lnRef>
+          <a:fillRef idx="3">
+            <a:schemeClr val="accent1"/>
+          </a:fillRef>
+          <a:effectRef idx="2">
+            <a:schemeClr val="accent1"/>
+          </a:effectRef>
+          <a:fontRef idx="minor">
+            <a:schemeClr val="lt1"/>
+          </a:fontRef>
+        </p:style>
+        <p:txBody>
+          <a:bodyPr rtlCol="0" anchor="ctr" wrap="square" lIns="320040" rIns="320040"/>
+          <a:lstStyle/>
+          <a:p>
+            <a:pPr algn="l">
+              <a:lnSpc>
+                <a:spcPct val="115000"/>
+              </a:lnSpc>
+            </a:pPr>
+            <a:r>
+              <a:rPr sz="1300" b="0" i="1">
+                <a:solidFill>
+                  <a:srgbClr val="1B2A4A"/>
+                </a:solidFill>
+                <a:latin typeface="Calibri"/>
+              </a:rPr>
+              <a:t>O extremo “Paradoxo é o pior fenômeno” não se sustentou: era uma leitura de vieira_002 especificamente (também dependente de contexto — slide anterior), não do fenômeno em si. O confound de contexto segue significativo com n=25 (Mann-Whitney p ≈ 0,016).</a:t>
+            </a:r>
+          </a:p>
+        </p:txBody>
+      </p:sp>
+      <p:sp>
+        <p:nvSpPr>
+          <p:cNvPr id="21" name="TextBox 21"/>
+          <p:cNvSpPr txBox="1"/>
+          <p:nvPr/>
+        </p:nvSpPr>
+        <p:spPr>
+          <a:xfrm>
+            <a:off x="640080" y="6400800"/>
+            <a:ext cx="5486400" cy="320040"/>
+          </a:xfrm>
+          <a:prstGeom prst="rect">
+            <a:avLst/>
+          </a:prstGeom>
+          <a:noFill/>
+        </p:spPr>
+        <p:txBody>
+          <a:bodyPr wrap="square" lIns="0" rIns="0" tIns="0" bIns="0">
+            <a:spAutoFit/>
+          </a:bodyPr>
+          <a:lstStyle/>
+          <a:p>
+            <a:pPr algn="l"/>
+            <a:r>
+              <a:rPr sz="1000" b="0" i="0">
+                <a:solidFill>
+                  <a:srgbClr val="868E96"/>
+                </a:solidFill>
+                <a:latin typeface="Calibri"/>
+              </a:rPr>
+              <a:t>Laboratório de Estresse Semântico</a:t>
+            </a:r>
+          </a:p>
+        </p:txBody>
+      </p:sp>
+      <p:sp>
+        <p:nvSpPr>
+          <p:cNvPr id="22" name="TextBox 22"/>
+          <p:cNvSpPr txBox="1"/>
+          <p:nvPr/>
+        </p:nvSpPr>
+        <p:spPr>
+          <a:xfrm>
+            <a:off x="10637215" y="6400800"/>
+            <a:ext cx="914400" cy="320040"/>
+          </a:xfrm>
+          <a:prstGeom prst="rect">
+            <a:avLst/>
+          </a:prstGeom>
+          <a:noFill/>
+        </p:spPr>
+        <p:txBody>
+          <a:bodyPr wrap="square" lIns="0" rIns="0" tIns="0" bIns="0">
+            <a:spAutoFit/>
+          </a:bodyPr>
+          <a:lstStyle/>
+          <a:p>
+            <a:pPr algn="r"/>
+            <a:r>
+              <a:rPr sz="1000" b="0" i="0">
+                <a:solidFill>
+                  <a:srgbClr val="868E96"/>
+                </a:solidFill>
+                <a:latin typeface="Calibri"/>
+              </a:rPr>
+              <a:t>11</a:t>
+            </a:r>
+          </a:p>
+        </p:txBody>
+      </p:sp>
+    </p:spTree>
+  </p:cSld>
+  <p:clrMapOvr>
+    <a:masterClrMapping/>
+  </p:clrMapOvr>
+</p:sld>
+</file>
+
 <file path=ppt/slides/slide2.xml><?xml version="1.0" encoding="utf-8"?>
 <p:sld xmlns:a="http://schemas.openxmlformats.org/drawingml/2006/main" xmlns:p="http://schemas.openxmlformats.org/presentationml/2006/main" xmlns:r="http://schemas.openxmlformats.org/officeDocument/2006/relationships">
   <p:cSld>
@@ -4000,7 +6431,7 @@
                 </a:solidFill>
                 <a:latin typeface="Calibri"/>
               </a:rPr>
-              <a:t>2</a:t>
+              <a:t>3</a:t>
             </a:r>
           </a:p>
         </p:txBody>
@@ -4837,7 +7268,7 @@
                 </a:solidFill>
                 <a:latin typeface="Calibri"/>
               </a:rPr>
-              <a:t>3</a:t>
+              <a:t>4</a:t>
             </a:r>
           </a:p>
         </p:txBody>
@@ -5536,7 +7967,7 @@
                 </a:solidFill>
                 <a:latin typeface="Calibri"/>
               </a:rPr>
-              <a:t>4</a:t>
+              <a:t>5</a:t>
             </a:r>
           </a:p>
         </p:txBody>
@@ -6419,7 +8850,7 @@
                 </a:solidFill>
                 <a:latin typeface="Calibri"/>
               </a:rPr>
-              <a:t>5</a:t>
+              <a:t>8</a:t>
             </a:r>
           </a:p>
         </p:txBody>
@@ -6954,7 +9385,7 @@
                 </a:solidFill>
                 <a:latin typeface="Calibri"/>
               </a:rPr>
-              <a:t>6</a:t>
+              <a:t>9</a:t>
             </a:r>
           </a:p>
         </p:txBody>
@@ -7070,7 +9501,7 @@
             <a:avLst/>
           </a:prstGeom>
           <a:solidFill>
-            <a:srgbClr val="3B5BDB"/>
+            <a:srgbClr val="0CA678"/>
           </a:solidFill>
           <a:ln>
             <a:noFill/>
@@ -7138,7 +9569,7 @@
                 </a:solidFill>
                 <a:latin typeface="Calibri"/>
               </a:rPr>
-              <a:t>Expandir o dataset</a:t>
+              <a:t>Expandir o dataset (concluído)</a:t>
             </a:r>
           </a:p>
         </p:txBody>
@@ -7177,7 +9608,7 @@
                 </a:solidFill>
                 <a:latin typeface="Calibri"/>
               </a:rPr>
-              <a:t>Mais exemplos por fenômeno linguístico, além do piloto atual (12 pares).</a:t>
+              <a:t>Dataset ampliado de 12 para 25 pares — mais Camões, Gregório de Matos, Machado de Assis e Fernando Pessoa/Ricardo Reis (Seção 8 do notebook).</a:t>
             </a:r>
           </a:p>
         </p:txBody>
@@ -7503,7 +9934,7 @@
                 </a:solidFill>
                 <a:latin typeface="Calibri"/>
               </a:rPr>
-              <a:t>Comparações consistentes por categoria de fenômeno, com significância estatística.</a:t>
+              <a:t>Com n=25, Paradoxo, Antítese, Hipérbato e Zeugma já têm múltiplas observações (Seção 8) — e a hierarquia original não se sustentou. Falta balancear autocontido/dependente de contexto dentro de cada fenômeno para separar os dois efeitos.</a:t>
             </a:r>
           </a:p>
         </p:txBody>
@@ -7573,7 +10004,1152 @@
                 </a:solidFill>
                 <a:latin typeface="Calibri"/>
               </a:rPr>
-              <a:t>7</a:t>
+              <a:t>12</a:t>
+            </a:r>
+          </a:p>
+        </p:txBody>
+      </p:sp>
+    </p:spTree>
+  </p:cSld>
+  <p:clrMapOvr>
+    <a:masterClrMapping/>
+  </p:clrMapOvr>
+</p:sld>
+</file>
+
+<file path=ppt/slides/slide8.xml><?xml version="1.0" encoding="utf-8"?>
+<p:sld xmlns:a="http://schemas.openxmlformats.org/drawingml/2006/main" xmlns:p="http://schemas.openxmlformats.org/presentationml/2006/main" xmlns:r="http://schemas.openxmlformats.org/officeDocument/2006/relationships">
+  <p:cSld>
+    <p:bg>
+      <p:bgPr>
+        <a:solidFill>
+          <a:srgbClr val="FFFFFF"/>
+        </a:solidFill>
+        <a:effectLst/>
+      </p:bgPr>
+    </p:bg>
+    <p:spTree>
+      <p:nvGrpSpPr>
+        <p:cNvPr id="1" name=""/>
+        <p:cNvGrpSpPr/>
+        <p:nvPr/>
+      </p:nvGrpSpPr>
+      <p:grpSpPr/>
+      <p:sp>
+        <p:nvSpPr>
+          <p:cNvPr id="2" name="TextBox 2"/>
+          <p:cNvSpPr txBox="1"/>
+          <p:nvPr/>
+        </p:nvSpPr>
+        <p:spPr>
+          <a:xfrm>
+            <a:off x="640080" y="411480"/>
+            <a:ext cx="10911535" cy="320040"/>
+          </a:xfrm>
+          <a:prstGeom prst="rect">
+            <a:avLst/>
+          </a:prstGeom>
+          <a:noFill/>
+        </p:spPr>
+        <p:txBody>
+          <a:bodyPr wrap="square" lIns="0" rIns="0" tIns="0" bIns="0">
+            <a:spAutoFit/>
+          </a:bodyPr>
+          <a:lstStyle/>
+          <a:p>
+            <a:pPr algn="l"/>
+            <a:r>
+              <a:rPr sz="1200" b="1" i="0">
+                <a:solidFill>
+                  <a:srgbClr val="3B5BDB"/>
+                </a:solidFill>
+                <a:latin typeface="Calibri"/>
+              </a:rPr>
+              <a:t>ORIGEM</a:t>
+            </a:r>
+          </a:p>
+        </p:txBody>
+      </p:sp>
+      <p:sp>
+        <p:nvSpPr>
+          <p:cNvPr id="3" name="TextBox 3"/>
+          <p:cNvSpPr txBox="1"/>
+          <p:nvPr/>
+        </p:nvSpPr>
+        <p:spPr>
+          <a:xfrm>
+            <a:off x="640080" y="777240"/>
+            <a:ext cx="10911535" cy="731520"/>
+          </a:xfrm>
+          <a:prstGeom prst="rect">
+            <a:avLst/>
+          </a:prstGeom>
+          <a:noFill/>
+        </p:spPr>
+        <p:txBody>
+          <a:bodyPr wrap="square" lIns="0" rIns="0" tIns="0" bIns="0">
+            <a:spAutoFit/>
+          </a:bodyPr>
+          <a:lstStyle/>
+          <a:p>
+            <a:pPr algn="l"/>
+            <a:r>
+              <a:rPr sz="3000" b="1" i="0">
+                <a:solidFill>
+                  <a:srgbClr val="1B2A4A"/>
+                </a:solidFill>
+                <a:latin typeface="Calibri"/>
+              </a:rPr>
+              <a:t>De onde veio a ideia</a:t>
+            </a:r>
+          </a:p>
+        </p:txBody>
+      </p:sp>
+      <p:sp>
+        <p:nvSpPr>
+          <p:cNvPr id="4" name="Ring"/>
+          <p:cNvSpPr/>
+          <p:nvPr/>
+        </p:nvSpPr>
+        <p:spPr>
+          <a:xfrm>
+            <a:off x="1463040" y="1508760"/>
+            <a:ext cx="3383280" cy="3383280"/>
+          </a:xfrm>
+          <a:prstGeom prst="ellipse">
+            <a:avLst/>
+          </a:prstGeom>
+          <a:solidFill>
+            <a:srgbClr val="E7ECFC"/>
+          </a:solidFill>
+          <a:ln>
+            <a:noFill/>
+          </a:ln>
+          <a:effectLst/>
+        </p:spPr>
+        <p:style>
+          <a:lnRef idx="1">
+            <a:schemeClr val="accent1"/>
+          </a:lnRef>
+          <a:fillRef idx="3">
+            <a:schemeClr val="accent1"/>
+          </a:fillRef>
+          <a:effectRef idx="2">
+            <a:schemeClr val="accent1"/>
+          </a:effectRef>
+          <a:fontRef idx="minor">
+            <a:schemeClr val="lt1"/>
+          </a:fontRef>
+        </p:style>
+        <p:txBody>
+          <a:bodyPr rtlCol="0" anchor="ctr"/>
+          <a:lstStyle/>
+          <a:p>
+            <a:pPr algn="ctr"/>
+          </a:p>
+        </p:txBody>
+      </p:sp>
+      <p:pic>
+        <p:nvPicPr>
+          <p:cNvPr id="5" name="Foto Bruna Martiolli"/>
+          <p:cNvPicPr>
+            <a:picLocks noChangeAspect="1"/>
+          </p:cNvPicPr>
+          <p:nvPr/>
+        </p:nvPicPr>
+        <p:blipFill>
+          <a:blip r:embed="rId2"/>
+          <a:stretch>
+            <a:fillRect/>
+          </a:stretch>
+        </p:blipFill>
+        <p:spPr>
+          <a:xfrm>
+            <a:off x="1554480" y="1600200"/>
+            <a:ext cx="3200400" cy="3200400"/>
+          </a:xfrm>
+          <a:prstGeom prst="ellipse">
+            <a:avLst/>
+          </a:prstGeom>
+          <a:ln w="38100">
+            <a:solidFill>
+              <a:srgbClr val="FFFFFF"/>
+            </a:solidFill>
+          </a:ln>
+          <a:effectLst/>
+        </p:spPr>
+      </p:pic>
+      <p:sp>
+        <p:nvSpPr>
+          <p:cNvPr id="6" name="TextBox 6"/>
+          <p:cNvSpPr txBox="1"/>
+          <p:nvPr/>
+        </p:nvSpPr>
+        <p:spPr>
+          <a:xfrm>
+            <a:off x="640080" y="5029200"/>
+            <a:ext cx="5029200" cy="640080"/>
+          </a:xfrm>
+          <a:prstGeom prst="rect">
+            <a:avLst/>
+          </a:prstGeom>
+          <a:noFill/>
+        </p:spPr>
+        <p:txBody>
+          <a:bodyPr wrap="square" lIns="0" rIns="0" tIns="0" bIns="0">
+            <a:spAutoFit/>
+          </a:bodyPr>
+          <a:lstStyle/>
+          <a:p>
+            <a:pPr algn="ctr">
+              <a:lnSpc>
+                <a:spcPct val="115000"/>
+              </a:lnSpc>
+            </a:pPr>
+            <a:r>
+              <a:rPr sz="1600" b="1" i="0">
+                <a:solidFill>
+                  <a:srgbClr val="1B2A4A"/>
+                </a:solidFill>
+                <a:latin typeface="Calibri"/>
+              </a:rPr>
+              <a:t>Bruna Martiolli</a:t>
+            </a:r>
+          </a:p>
+          <a:p>
+            <a:pPr algn="ctr">
+              <a:lnSpc>
+                <a:spcPct val="115000"/>
+              </a:lnSpc>
+              <a:spcBef>
+                <a:spcPts val="1300"/>
+              </a:spcBef>
+            </a:pPr>
+            <a:r>
+              <a:rPr sz="1250" b="0" i="0">
+                <a:solidFill>
+                  <a:srgbClr val="868E96"/>
+                </a:solidFill>
+                <a:latin typeface="Calibri"/>
+              </a:rPr>
+              <a:t>Professora de Literatura — doutoranda, pesquisa sobre Agustina Bessa-Luís</a:t>
+            </a:r>
+          </a:p>
+        </p:txBody>
+      </p:sp>
+      <p:sp>
+        <p:nvSpPr>
+          <p:cNvPr id="7" name="TextBox 7"/>
+          <p:cNvSpPr txBox="1"/>
+          <p:nvPr/>
+        </p:nvSpPr>
+        <p:spPr>
+          <a:xfrm>
+            <a:off x="6263640" y="1600200"/>
+            <a:ext cx="5212080" cy="3300000"/>
+          </a:xfrm>
+          <a:prstGeom prst="rect">
+            <a:avLst/>
+          </a:prstGeom>
+          <a:noFill/>
+        </p:spPr>
+        <p:txBody>
+          <a:bodyPr wrap="square" lIns="0" rIns="0" tIns="0" bIns="0">
+            <a:spAutoFit/>
+          </a:bodyPr>
+          <a:lstStyle/>
+          <a:p>
+            <a:pPr algn="l">
+              <a:lnSpc>
+                <a:spcPct val="115000"/>
+              </a:lnSpc>
+            </a:pPr>
+            <a:r>
+              <a:rPr sz="1500" b="0" i="0">
+                <a:solidFill>
+                  <a:srgbClr val="1B2A4A"/>
+                </a:solidFill>
+                <a:latin typeface="Calibri"/>
+              </a:rPr>
+              <a:t>Tudo começou ao assistir a um vídeo da professora de literatura Bruna Martiolli, que faz doutorado sobre Agustina Bessa-Luís.</a:t>
+            </a:r>
+          </a:p>
+          <a:p>
+            <a:pPr algn="l">
+              <a:lnSpc>
+                <a:spcPct val="115000"/>
+              </a:lnSpc>
+              <a:spcBef>
+                <a:spcPts val="1300"/>
+              </a:spcBef>
+            </a:pPr>
+            <a:r>
+              <a:rPr sz="1500" b="0" i="0">
+                <a:solidFill>
+                  <a:srgbClr val="495057"/>
+                </a:solidFill>
+                <a:latin typeface="Calibri"/>
+              </a:rPr>
+              <a:t>Ela comentou que tinha dificuldade em usar IA no seu trabalho: os modelos não conseguiam interpretar bem os textos literários complexos que ela analisa.</a:t>
+            </a:r>
+          </a:p>
+          <a:p>
+            <a:pPr algn="l">
+              <a:lnSpc>
+                <a:spcPct val="115000"/>
+              </a:lnSpc>
+              <a:spcBef>
+                <a:spcPts val="1300"/>
+              </a:spcBef>
+            </a:pPr>
+            <a:r>
+              <a:rPr sz="1500" b="0" i="0">
+                <a:solidFill>
+                  <a:srgbClr val="495057"/>
+                </a:solidFill>
+                <a:latin typeface="Calibri"/>
+              </a:rPr>
+              <a:t>Como, eu estava estudando embeddings — virou uma pergunta de pesquisa: será que uma frase complexa e sua versão simplificada, com o mesmo significado, ficam realmente próximas quando processadas por um modelo de embedding?</a:t>
+            </a:r>
+          </a:p>
+        </p:txBody>
+      </p:sp>
+      <p:sp>
+        <p:nvSpPr>
+          <p:cNvPr id="8" name="Rounded Rectangle 8"/>
+          <p:cNvSpPr/>
+          <p:nvPr/>
+        </p:nvSpPr>
+        <p:spPr>
+          <a:xfrm>
+            <a:off x="6263640" y="5532120"/>
+            <a:ext cx="5212080" cy="777240"/>
+          </a:xfrm>
+          <a:prstGeom prst="roundRect">
+            <a:avLst>
+              <a:gd name="adj" fmla="val 10000"/>
+            </a:avLst>
+          </a:prstGeom>
+          <a:solidFill>
+            <a:srgbClr val="E7ECFC"/>
+          </a:solidFill>
+          <a:ln>
+            <a:noFill/>
+          </a:ln>
+          <a:effectLst/>
+        </p:spPr>
+        <p:style>
+          <a:lnRef idx="1">
+            <a:schemeClr val="accent1"/>
+          </a:lnRef>
+          <a:fillRef idx="3">
+            <a:schemeClr val="accent1"/>
+          </a:fillRef>
+          <a:effectRef idx="2">
+            <a:schemeClr val="accent1"/>
+          </a:effectRef>
+          <a:fontRef idx="minor">
+            <a:schemeClr val="lt1"/>
+          </a:fontRef>
+        </p:style>
+        <p:txBody>
+          <a:bodyPr rtlCol="0" anchor="ctr" wrap="square" lIns="228600" rIns="228600"/>
+          <a:lstStyle/>
+          <a:p>
+            <a:pPr algn="l">
+              <a:lnSpc>
+                <a:spcPct val="112000"/>
+              </a:lnSpc>
+            </a:pPr>
+            <a:r>
+              <a:rPr sz="1400" b="0" i="1">
+                <a:solidFill>
+                  <a:srgbClr val="1B2A4A"/>
+                </a:solidFill>
+                <a:latin typeface="Calibri"/>
+              </a:rPr>
+              <a:t>Se o modelo de embedding realmente capturasse o sentido profundo, as duas versões deveriam ficar “próximas” no espaço vetorial, independente da complexidade da escrita.</a:t>
+            </a:r>
+          </a:p>
+        </p:txBody>
+      </p:sp>
+      <p:sp>
+        <p:nvSpPr>
+          <p:cNvPr id="9" name="TextBox 9"/>
+          <p:cNvSpPr txBox="1"/>
+          <p:nvPr/>
+        </p:nvSpPr>
+        <p:spPr>
+          <a:xfrm>
+            <a:off x="640080" y="6400800"/>
+            <a:ext cx="5486400" cy="320040"/>
+          </a:xfrm>
+          <a:prstGeom prst="rect">
+            <a:avLst/>
+          </a:prstGeom>
+          <a:noFill/>
+        </p:spPr>
+        <p:txBody>
+          <a:bodyPr wrap="square" lIns="0" rIns="0" tIns="0" bIns="0">
+            <a:spAutoFit/>
+          </a:bodyPr>
+          <a:lstStyle/>
+          <a:p>
+            <a:pPr algn="l"/>
+            <a:r>
+              <a:rPr sz="1000" b="0" i="0">
+                <a:solidFill>
+                  <a:srgbClr val="868E96"/>
+                </a:solidFill>
+                <a:latin typeface="Calibri"/>
+              </a:rPr>
+              <a:t>Laboratório de Estresse Semântico</a:t>
+            </a:r>
+          </a:p>
+        </p:txBody>
+      </p:sp>
+      <p:sp>
+        <p:nvSpPr>
+          <p:cNvPr id="10" name="TextBox 10"/>
+          <p:cNvSpPr txBox="1"/>
+          <p:nvPr/>
+        </p:nvSpPr>
+        <p:spPr>
+          <a:xfrm>
+            <a:off x="10637215" y="6400800"/>
+            <a:ext cx="914400" cy="320040"/>
+          </a:xfrm>
+          <a:prstGeom prst="rect">
+            <a:avLst/>
+          </a:prstGeom>
+          <a:noFill/>
+        </p:spPr>
+        <p:txBody>
+          <a:bodyPr wrap="square" lIns="0" rIns="0" tIns="0" bIns="0">
+            <a:spAutoFit/>
+          </a:bodyPr>
+          <a:lstStyle/>
+          <a:p>
+            <a:pPr algn="r"/>
+            <a:r>
+              <a:rPr sz="1000" b="0" i="0">
+                <a:solidFill>
+                  <a:srgbClr val="868E96"/>
+                </a:solidFill>
+                <a:latin typeface="Calibri"/>
+              </a:rPr>
+              <a:t>2</a:t>
+            </a:r>
+          </a:p>
+        </p:txBody>
+      </p:sp>
+    </p:spTree>
+  </p:cSld>
+  <p:clrMapOvr>
+    <a:masterClrMapping/>
+  </p:clrMapOvr>
+</p:sld>
+</file>
+
+<file path=ppt/slides/slide9.xml><?xml version="1.0" encoding="utf-8"?>
+<p:sld xmlns:a="http://schemas.openxmlformats.org/drawingml/2006/main" xmlns:p="http://schemas.openxmlformats.org/presentationml/2006/main" xmlns:r="http://schemas.openxmlformats.org/officeDocument/2006/relationships">
+  <p:cSld>
+    <p:bg>
+      <p:bgPr>
+        <a:solidFill>
+          <a:srgbClr val="FFFFFF"/>
+        </a:solidFill>
+        <a:effectLst/>
+      </p:bgPr>
+    </p:bg>
+    <p:spTree>
+      <p:nvGrpSpPr>
+        <p:cNvPr id="1" name=""/>
+        <p:cNvGrpSpPr/>
+        <p:nvPr/>
+      </p:nvGrpSpPr>
+      <p:grpSpPr/>
+      <p:sp>
+        <p:nvSpPr>
+          <p:cNvPr id="2" name="TextBox 2"/>
+          <p:cNvSpPr txBox="1"/>
+          <p:nvPr/>
+        </p:nvSpPr>
+        <p:spPr>
+          <a:xfrm>
+            <a:off x="640080" y="411480"/>
+            <a:ext cx="10911535" cy="320040"/>
+          </a:xfrm>
+          <a:prstGeom prst="rect">
+            <a:avLst/>
+          </a:prstGeom>
+          <a:noFill/>
+        </p:spPr>
+        <p:txBody>
+          <a:bodyPr wrap="square" lIns="0" rIns="0" tIns="0" bIns="0">
+            <a:spAutoFit/>
+          </a:bodyPr>
+          <a:lstStyle/>
+          <a:p>
+            <a:pPr algn="l"/>
+            <a:r>
+              <a:rPr sz="1200" b="1" i="0">
+                <a:solidFill>
+                  <a:srgbClr val="3B5BDB"/>
+                </a:solidFill>
+                <a:latin typeface="Calibri"/>
+              </a:rPr>
+              <a:t>MATEMÁTICA</a:t>
+            </a:r>
+          </a:p>
+        </p:txBody>
+      </p:sp>
+      <p:sp>
+        <p:nvSpPr>
+          <p:cNvPr id="3" name="TextBox 3"/>
+          <p:cNvSpPr txBox="1"/>
+          <p:nvPr/>
+        </p:nvSpPr>
+        <p:spPr>
+          <a:xfrm>
+            <a:off x="640080" y="777240"/>
+            <a:ext cx="10911535" cy="731520"/>
+          </a:xfrm>
+          <a:prstGeom prst="rect">
+            <a:avLst/>
+          </a:prstGeom>
+          <a:noFill/>
+        </p:spPr>
+        <p:txBody>
+          <a:bodyPr wrap="square" lIns="0" rIns="0" tIns="0" bIns="0">
+            <a:spAutoFit/>
+          </a:bodyPr>
+          <a:lstStyle/>
+          <a:p>
+            <a:pPr algn="l"/>
+            <a:r>
+              <a:rPr sz="3000" b="1" i="0">
+                <a:solidFill>
+                  <a:srgbClr val="1B2A4A"/>
+                </a:solidFill>
+                <a:latin typeface="Calibri"/>
+              </a:rPr>
+              <a:t>Como o cosseno mede a similaridade</a:t>
+            </a:r>
+          </a:p>
+        </p:txBody>
+      </p:sp>
+      <p:pic>
+        <p:nvPicPr>
+          <p:cNvPr id="4" name="Fórmula similaridade de cosseno"/>
+          <p:cNvPicPr>
+            <a:picLocks noChangeAspect="1"/>
+          </p:cNvPicPr>
+          <p:nvPr/>
+        </p:nvPicPr>
+        <p:blipFill>
+          <a:blip r:embed="rId2"/>
+          <a:stretch>
+            <a:fillRect/>
+          </a:stretch>
+        </p:blipFill>
+        <p:spPr>
+          <a:xfrm>
+            <a:off x="3495847" y="1706880"/>
+            <a:ext cx="5200000" cy="1315057"/>
+          </a:xfrm>
+          <a:prstGeom prst="rect">
+            <a:avLst/>
+          </a:prstGeom>
+          <a:effectLst/>
+        </p:spPr>
+      </p:pic>
+      <p:sp>
+        <p:nvSpPr>
+          <p:cNvPr id="5" name="TextBox 5"/>
+          <p:cNvSpPr txBox="1"/>
+          <p:nvPr/>
+        </p:nvSpPr>
+        <p:spPr>
+          <a:xfrm>
+            <a:off x="640080" y="3341977"/>
+            <a:ext cx="5029200" cy="2867920"/>
+          </a:xfrm>
+          <a:prstGeom prst="rect">
+            <a:avLst/>
+          </a:prstGeom>
+          <a:noFill/>
+        </p:spPr>
+        <p:txBody>
+          <a:bodyPr wrap="square" lIns="0" rIns="0" tIns="0" bIns="0">
+            <a:spAutoFit/>
+          </a:bodyPr>
+          <a:lstStyle/>
+          <a:p>
+            <a:pPr algn="l">
+              <a:lnSpc>
+                <a:spcPct val="112000"/>
+              </a:lnSpc>
+            </a:pPr>
+            <a:r>
+              <a:rPr sz="1300" b="1" i="0">
+                <a:solidFill>
+                  <a:srgbClr val="3B5BDB"/>
+                </a:solidFill>
+                <a:latin typeface="Calibri"/>
+              </a:rPr>
+              <a:t>●  </a:t>
+            </a:r>
+            <a:r>
+              <a:rPr sz="1400" b="1" i="0">
+                <a:solidFill>
+                  <a:srgbClr val="1B2A4A"/>
+                </a:solidFill>
+                <a:latin typeface="Calibri"/>
+              </a:rPr>
+              <a:t>A e B</a:t>
+            </a:r>
+            <a:r>
+              <a:rPr sz="1400" b="0" i="0">
+                <a:solidFill>
+                  <a:srgbClr val="495057"/>
+                </a:solidFill>
+                <a:latin typeface="Calibri"/>
+              </a:rPr>
+              <a:t> são os vetores (embeddings) dos dois textos sendo comparados.</a:t>
+            </a:r>
+          </a:p>
+          <a:p>
+            <a:pPr algn="l">
+              <a:lnSpc>
+                <a:spcPct val="112000"/>
+              </a:lnSpc>
+              <a:spcBef>
+                <a:spcPts val="1300"/>
+              </a:spcBef>
+            </a:pPr>
+            <a:r>
+              <a:rPr sz="1300" b="1" i="0">
+                <a:solidFill>
+                  <a:srgbClr val="3B5BDB"/>
+                </a:solidFill>
+                <a:latin typeface="Calibri"/>
+              </a:rPr>
+              <a:t>●  </a:t>
+            </a:r>
+            <a:r>
+              <a:rPr sz="1400" b="1" i="0">
+                <a:solidFill>
+                  <a:srgbClr val="1B2A4A"/>
+                </a:solidFill>
+                <a:latin typeface="Calibri"/>
+              </a:rPr>
+              <a:t>Numerador (A · B)</a:t>
+            </a:r>
+            <a:r>
+              <a:rPr sz="1400" b="0" i="0">
+                <a:solidFill>
+                  <a:srgbClr val="495057"/>
+                </a:solidFill>
+                <a:latin typeface="Calibri"/>
+              </a:rPr>
+              <a:t> é o produto escalar entre os vetores.</a:t>
+            </a:r>
+          </a:p>
+          <a:p>
+            <a:pPr algn="l">
+              <a:lnSpc>
+                <a:spcPct val="112000"/>
+              </a:lnSpc>
+              <a:spcBef>
+                <a:spcPts val="1300"/>
+              </a:spcBef>
+            </a:pPr>
+            <a:r>
+              <a:rPr sz="1300" b="1" i="0">
+                <a:solidFill>
+                  <a:srgbClr val="3B5BDB"/>
+                </a:solidFill>
+                <a:latin typeface="Calibri"/>
+              </a:rPr>
+              <a:t>●  </a:t>
+            </a:r>
+            <a:r>
+              <a:rPr sz="1400" b="1" i="0">
+                <a:solidFill>
+                  <a:srgbClr val="1B2A4A"/>
+                </a:solidFill>
+                <a:latin typeface="Calibri"/>
+              </a:rPr>
+              <a:t>Denominador (‖A‖ × ‖B‖)</a:t>
+            </a:r>
+            <a:r>
+              <a:rPr sz="1400" b="0" i="0">
+                <a:solidFill>
+                  <a:srgbClr val="495057"/>
+                </a:solidFill>
+                <a:latin typeface="Calibri"/>
+              </a:rPr>
+              <a:t> normaliza pelo tamanho (norma) de cada vetor.</a:t>
+            </a:r>
+          </a:p>
+          <a:p>
+            <a:pPr algn="l">
+              <a:lnSpc>
+                <a:spcPct val="112000"/>
+              </a:lnSpc>
+              <a:spcBef>
+                <a:spcPts val="1300"/>
+              </a:spcBef>
+            </a:pPr>
+            <a:r>
+              <a:rPr sz="1300" b="1" i="0">
+                <a:solidFill>
+                  <a:srgbClr val="3B5BDB"/>
+                </a:solidFill>
+                <a:latin typeface="Calibri"/>
+              </a:rPr>
+              <a:t>●  </a:t>
+            </a:r>
+            <a:r>
+              <a:rPr sz="1400" b="1" i="0">
+                <a:solidFill>
+                  <a:srgbClr val="1B2A4A"/>
+                </a:solidFill>
+                <a:latin typeface="Calibri"/>
+              </a:rPr>
+              <a:t>Resultado</a:t>
+            </a:r>
+            <a:r>
+              <a:rPr sz="1400" b="0" i="0">
+                <a:solidFill>
+                  <a:srgbClr val="495057"/>
+                </a:solidFill>
+                <a:latin typeface="Calibri"/>
+              </a:rPr>
+              <a:t> varia de −1 a 1: quanto mais perto de 1, mais “parecidos” os textos são; quanto mais perto de 0, mais diferentes.</a:t>
+            </a:r>
+          </a:p>
+        </p:txBody>
+      </p:sp>
+      <p:sp>
+        <p:nvSpPr>
+          <p:cNvPr id="6" name="Rounded Rectangle 6"/>
+          <p:cNvSpPr/>
+          <p:nvPr/>
+        </p:nvSpPr>
+        <p:spPr>
+          <a:xfrm>
+            <a:off x="6263640" y="3341977"/>
+            <a:ext cx="5212080" cy="2867920"/>
+          </a:xfrm>
+          <a:prstGeom prst="roundRect">
+            <a:avLst>
+              <a:gd name="adj" fmla="val 6000"/>
+            </a:avLst>
+          </a:prstGeom>
+          <a:solidFill>
+            <a:srgbClr val="F6F7F9"/>
+          </a:solidFill>
+          <a:ln>
+            <a:noFill/>
+          </a:ln>
+          <a:effectLst/>
+        </p:spPr>
+        <p:style>
+          <a:lnRef idx="1">
+            <a:schemeClr val="accent1"/>
+          </a:lnRef>
+          <a:fillRef idx="3">
+            <a:schemeClr val="accent1"/>
+          </a:fillRef>
+          <a:effectRef idx="2">
+            <a:schemeClr val="accent1"/>
+          </a:effectRef>
+          <a:fontRef idx="minor">
+            <a:schemeClr val="lt1"/>
+          </a:fontRef>
+        </p:style>
+        <p:txBody>
+          <a:bodyPr rtlCol="0" anchor="ctr"/>
+          <a:lstStyle/>
+          <a:p>
+            <a:pPr algn="ctr"/>
+          </a:p>
+        </p:txBody>
+      </p:sp>
+      <p:sp>
+        <p:nvSpPr>
+          <p:cNvPr id="7" name="TextBox 7"/>
+          <p:cNvSpPr txBox="1"/>
+          <p:nvPr/>
+        </p:nvSpPr>
+        <p:spPr>
+          <a:xfrm>
+            <a:off x="6492240" y="3524857"/>
+            <a:ext cx="4754880" cy="640080"/>
+          </a:xfrm>
+          <a:prstGeom prst="rect">
+            <a:avLst/>
+          </a:prstGeom>
+          <a:noFill/>
+        </p:spPr>
+        <p:txBody>
+          <a:bodyPr wrap="square" lIns="0" rIns="0" tIns="0" bIns="0">
+            <a:spAutoFit/>
+          </a:bodyPr>
+          <a:lstStyle/>
+          <a:p>
+            <a:pPr algn="ctr">
+              <a:lnSpc>
+                <a:spcPct val="115000"/>
+              </a:lnSpc>
+            </a:pPr>
+            <a:r>
+              <a:rPr sz="1250" b="0" i="1">
+                <a:solidFill>
+                  <a:srgbClr val="1B2A4A"/>
+                </a:solidFill>
+                <a:latin typeface="Calibri"/>
+              </a:rPr>
+              <a:t>Ângulo pequeno → maior similaridade  ·  ângulo grande → menor similaridade</a:t>
+            </a:r>
+          </a:p>
+        </p:txBody>
+      </p:sp>
+      <p:cxnSp>
+        <p:nvCxnSpPr>
+          <p:cNvPr id="8" name="Connector 8"/>
+          <p:cNvCxnSpPr/>
+          <p:nvPr/>
+        </p:nvCxnSpPr>
+        <p:spPr>
+          <a:xfrm flipV="1">
+            <a:off x="7163640" y="4312715"/>
+            <a:ext cx="1189157" cy="1417182"/>
+          </a:xfrm>
+          <a:prstGeom prst="line">
+            <a:avLst/>
+          </a:prstGeom>
+          <a:ln w="25400">
+            <a:solidFill>
+              <a:srgbClr val="1B2A4A"/>
+            </a:solidFill>
+            <a:tailEnd type="triangle" w="med" len="med"/>
+          </a:ln>
+        </p:spPr>
+        <p:style>
+          <a:lnRef idx="2">
+            <a:schemeClr val="accent1"/>
+          </a:lnRef>
+          <a:fillRef idx="0">
+            <a:schemeClr val="accent1"/>
+          </a:fillRef>
+          <a:effectRef idx="1">
+            <a:schemeClr val="accent1"/>
+          </a:effectRef>
+          <a:fontRef idx="minor">
+            <a:schemeClr val="tx1"/>
+          </a:fontRef>
+        </p:style>
+      </p:cxnSp>
+      <p:cxnSp>
+        <p:nvCxnSpPr>
+          <p:cNvPr id="9" name="Connector 9"/>
+          <p:cNvCxnSpPr/>
+          <p:nvPr/>
+        </p:nvCxnSpPr>
+        <p:spPr>
+          <a:xfrm flipV="1">
+            <a:off x="7163640" y="5251082"/>
+            <a:ext cx="1786962" cy="478815"/>
+          </a:xfrm>
+          <a:prstGeom prst="line">
+            <a:avLst/>
+          </a:prstGeom>
+          <a:ln w="25400">
+            <a:solidFill>
+              <a:srgbClr val="1B2A4A"/>
+            </a:solidFill>
+            <a:tailEnd type="triangle" w="med" len="med"/>
+          </a:ln>
+        </p:spPr>
+        <p:style>
+          <a:lnRef idx="2">
+            <a:schemeClr val="accent1"/>
+          </a:lnRef>
+          <a:fillRef idx="0">
+            <a:schemeClr val="accent1"/>
+          </a:fillRef>
+          <a:effectRef idx="1">
+            <a:schemeClr val="accent1"/>
+          </a:effectRef>
+          <a:fontRef idx="minor">
+            <a:schemeClr val="tx1"/>
+          </a:fontRef>
+        </p:style>
+      </p:cxnSp>
+      <p:sp>
+        <p:nvSpPr>
+          <p:cNvPr id="10" name="Arc 10"/>
+          <p:cNvSpPr/>
+          <p:nvPr/>
+        </p:nvSpPr>
+        <p:spPr>
+          <a:xfrm>
+            <a:off x="6543640" y="5109897"/>
+            <a:ext cx="1240000" cy="1240000"/>
+          </a:xfrm>
+          <a:prstGeom prst="arc">
+            <a:avLst>
+              <a:gd name="adj1" fmla="val 18600000"/>
+              <a:gd name="adj2" fmla="val 20700000"/>
+            </a:avLst>
+          </a:prstGeom>
+          <a:ln w="19050">
+            <a:solidFill>
+              <a:srgbClr val="3B5BDB"/>
+            </a:solidFill>
+          </a:ln>
+          <a:effectLst/>
+        </p:spPr>
+        <p:style>
+          <a:lnRef idx="2">
+            <a:schemeClr val="accent1"/>
+          </a:lnRef>
+          <a:fillRef idx="0">
+            <a:schemeClr val="accent1"/>
+          </a:fillRef>
+          <a:effectRef idx="1">
+            <a:schemeClr val="accent1"/>
+          </a:effectRef>
+          <a:fontRef idx="minor">
+            <a:schemeClr val="tx1"/>
+          </a:fontRef>
+        </p:style>
+        <p:txBody>
+          <a:bodyPr rtlCol="0" anchor="ctr"/>
+          <a:lstStyle/>
+          <a:p>
+            <a:pPr algn="ctr"/>
+          </a:p>
+        </p:txBody>
+      </p:sp>
+      <p:sp>
+        <p:nvSpPr>
+          <p:cNvPr id="11" name="TextBox 11"/>
+          <p:cNvSpPr txBox="1"/>
+          <p:nvPr/>
+        </p:nvSpPr>
+        <p:spPr>
+          <a:xfrm>
+            <a:off x="7688353" y="5150058"/>
+            <a:ext cx="300000" cy="300000"/>
+          </a:xfrm>
+          <a:prstGeom prst="rect">
+            <a:avLst/>
+          </a:prstGeom>
+          <a:noFill/>
+        </p:spPr>
+        <p:txBody>
+          <a:bodyPr wrap="square" lIns="0" rIns="0" tIns="0" bIns="0" anchor="ctr">
+            <a:spAutoFit/>
+          </a:bodyPr>
+          <a:lstStyle/>
+          <a:p>
+            <a:pPr algn="ctr"/>
+            <a:r>
+              <a:rPr sz="1400" b="1" i="0">
+                <a:solidFill>
+                  <a:srgbClr val="3B5BDB"/>
+                </a:solidFill>
+                <a:latin typeface="Calibri"/>
+              </a:rPr>
+              <a:t>θ</a:t>
+            </a:r>
+          </a:p>
+        </p:txBody>
+      </p:sp>
+      <p:sp>
+        <p:nvSpPr>
+          <p:cNvPr id="12" name="Oval 12"/>
+          <p:cNvSpPr/>
+          <p:nvPr/>
+        </p:nvSpPr>
+        <p:spPr>
+          <a:xfrm>
+            <a:off x="7123640" y="5689897"/>
+            <a:ext cx="80000" cy="80000"/>
+          </a:xfrm>
+          <a:prstGeom prst="ellipse">
+            <a:avLst/>
+          </a:prstGeom>
+          <a:solidFill>
+            <a:srgbClr val="1B2A4A"/>
+          </a:solidFill>
+          <a:ln>
+            <a:noFill/>
+          </a:ln>
+          <a:effectLst/>
+        </p:spPr>
+        <p:style>
+          <a:lnRef idx="1">
+            <a:schemeClr val="accent1"/>
+          </a:lnRef>
+          <a:fillRef idx="3">
+            <a:schemeClr val="accent1"/>
+          </a:fillRef>
+          <a:effectRef idx="2">
+            <a:schemeClr val="accent1"/>
+          </a:effectRef>
+          <a:fontRef idx="minor">
+            <a:schemeClr val="lt1"/>
+          </a:fontRef>
+        </p:style>
+        <p:txBody>
+          <a:bodyPr rtlCol="0" anchor="ctr"/>
+          <a:lstStyle/>
+          <a:p>
+            <a:pPr algn="ctr"/>
+          </a:p>
+        </p:txBody>
+      </p:sp>
+      <p:sp>
+        <p:nvSpPr>
+          <p:cNvPr id="13" name="TextBox 13"/>
+          <p:cNvSpPr txBox="1"/>
+          <p:nvPr/>
+        </p:nvSpPr>
+        <p:spPr>
+          <a:xfrm>
+            <a:off x="8392797" y="3972715"/>
+            <a:ext cx="300000" cy="300000"/>
+          </a:xfrm>
+          <a:prstGeom prst="rect">
+            <a:avLst/>
+          </a:prstGeom>
+          <a:noFill/>
+        </p:spPr>
+        <p:txBody>
+          <a:bodyPr wrap="square" lIns="0" rIns="0" tIns="0" bIns="0">
+            <a:spAutoFit/>
+          </a:bodyPr>
+          <a:lstStyle/>
+          <a:p>
+            <a:pPr algn="ctr"/>
+            <a:r>
+              <a:rPr sz="1500" b="1" i="0">
+                <a:solidFill>
+                  <a:srgbClr val="1B2A4A"/>
+                </a:solidFill>
+                <a:latin typeface="Calibri"/>
+              </a:rPr>
+              <a:t>A</a:t>
+            </a:r>
+          </a:p>
+        </p:txBody>
+      </p:sp>
+      <p:sp>
+        <p:nvSpPr>
+          <p:cNvPr id="14" name="TextBox 14"/>
+          <p:cNvSpPr txBox="1"/>
+          <p:nvPr/>
+        </p:nvSpPr>
+        <p:spPr>
+          <a:xfrm>
+            <a:off x="9010602" y="5111082"/>
+            <a:ext cx="300000" cy="300000"/>
+          </a:xfrm>
+          <a:prstGeom prst="rect">
+            <a:avLst/>
+          </a:prstGeom>
+          <a:noFill/>
+        </p:spPr>
+        <p:txBody>
+          <a:bodyPr wrap="square" lIns="0" rIns="0" tIns="0" bIns="0">
+            <a:spAutoFit/>
+          </a:bodyPr>
+          <a:lstStyle/>
+          <a:p>
+            <a:pPr algn="ctr"/>
+            <a:r>
+              <a:rPr sz="1500" b="1" i="0">
+                <a:solidFill>
+                  <a:srgbClr val="1B2A4A"/>
+                </a:solidFill>
+                <a:latin typeface="Calibri"/>
+              </a:rPr>
+              <a:t>B</a:t>
+            </a:r>
+          </a:p>
+        </p:txBody>
+      </p:sp>
+      <p:sp>
+        <p:nvSpPr>
+          <p:cNvPr id="15" name="TextBox 15"/>
+          <p:cNvSpPr txBox="1"/>
+          <p:nvPr/>
+        </p:nvSpPr>
+        <p:spPr>
+          <a:xfrm>
+            <a:off x="640080" y="6400800"/>
+            <a:ext cx="5486400" cy="320040"/>
+          </a:xfrm>
+          <a:prstGeom prst="rect">
+            <a:avLst/>
+          </a:prstGeom>
+          <a:noFill/>
+        </p:spPr>
+        <p:txBody>
+          <a:bodyPr wrap="square" lIns="0" rIns="0" tIns="0" bIns="0">
+            <a:spAutoFit/>
+          </a:bodyPr>
+          <a:lstStyle/>
+          <a:p>
+            <a:pPr algn="l"/>
+            <a:r>
+              <a:rPr sz="1000" b="0" i="0">
+                <a:solidFill>
+                  <a:srgbClr val="868E96"/>
+                </a:solidFill>
+                <a:latin typeface="Calibri"/>
+              </a:rPr>
+              <a:t>Laboratório de Estresse Semântico</a:t>
+            </a:r>
+          </a:p>
+        </p:txBody>
+      </p:sp>
+      <p:sp>
+        <p:nvSpPr>
+          <p:cNvPr id="16" name="TextBox 16"/>
+          <p:cNvSpPr txBox="1"/>
+          <p:nvPr/>
+        </p:nvSpPr>
+        <p:spPr>
+          <a:xfrm>
+            <a:off x="10637215" y="6400800"/>
+            <a:ext cx="914400" cy="320040"/>
+          </a:xfrm>
+          <a:prstGeom prst="rect">
+            <a:avLst/>
+          </a:prstGeom>
+          <a:noFill/>
+        </p:spPr>
+        <p:txBody>
+          <a:bodyPr wrap="square" lIns="0" rIns="0" tIns="0" bIns="0">
+            <a:spAutoFit/>
+          </a:bodyPr>
+          <a:lstStyle/>
+          <a:p>
+            <a:pPr algn="r"/>
+            <a:r>
+              <a:rPr sz="1000" b="0" i="0">
+                <a:solidFill>
+                  <a:srgbClr val="868E96"/>
+                </a:solidFill>
+                <a:latin typeface="Calibri"/>
+              </a:rPr>
+              <a:t>6</a:t>
             </a:r>
           </a:p>
         </p:txBody>

--- a/apresentacao/laboratorio_estresse_semantico.pptx
+++ b/apresentacao/laboratorio_estresse_semantico.pptx
@@ -16,6 +16,7 @@
     <p:sldId id="261" r:id="rId12"/>
     <p:sldId id="266" r:id="rId17"/>
     <p:sldId id="267" r:id="rId18"/>
+    <p:sldId id="268" r:id="rId19"/>
     <p:sldId id="262" r:id="rId13"/>
   </p:sldIdLst>
   <p:sldSz cx="12191695" cy="6858000" type="screen4x3"/>
@@ -5734,6 +5735,729 @@
 </p:sld>
 </file>
 
+<file path=ppt/slides/slide13.xml><?xml version="1.0" encoding="utf-8"?>
+<p:sld xmlns:a="http://schemas.openxmlformats.org/drawingml/2006/main" xmlns:p="http://schemas.openxmlformats.org/presentationml/2006/main" xmlns:r="http://schemas.openxmlformats.org/officeDocument/2006/relationships">
+  <p:cSld>
+    <p:bg>
+      <p:bgPr>
+        <a:solidFill>
+          <a:srgbClr val="FFFFFF"/>
+        </a:solidFill>
+        <a:effectLst/>
+      </p:bgPr>
+    </p:bg>
+    <p:spTree>
+      <p:nvGrpSpPr>
+        <p:cNvPr id="1" name=""/>
+        <p:cNvGrpSpPr/>
+        <p:nvPr/>
+      </p:nvGrpSpPr>
+      <p:grpSpPr/>
+      <p:sp>
+        <p:nvSpPr>
+          <p:cNvPr id="2" name="TextBox 23"/>
+          <p:cNvSpPr txBox="1"/>
+          <p:nvPr/>
+        </p:nvSpPr>
+        <p:spPr>
+          <a:xfrm>
+            <a:off x="640080" y="411480"/>
+            <a:ext cx="10911535" cy="320040"/>
+          </a:xfrm>
+          <a:prstGeom prst="rect">
+            <a:avLst/>
+          </a:prstGeom>
+          <a:noFill/>
+        </p:spPr>
+        <p:txBody>
+          <a:bodyPr wrap="square" lIns="0" rIns="0" tIns="0" bIns="0">
+            <a:spAutoFit/>
+          </a:bodyPr>
+          <a:lstStyle/>
+          <a:p>
+            <a:pPr algn="l"/>
+            <a:r>
+              <a:rPr sz="1200" b="1" i="0">
+                <a:solidFill>
+                  <a:srgbClr val="3B5BDB"/>
+                </a:solidFill>
+                <a:latin typeface="Calibri"/>
+              </a:rPr>
+              <a:t>SÍNTESE FINAL</a:t>
+            </a:r>
+          </a:p>
+        </p:txBody>
+      </p:sp>
+      <p:sp>
+        <p:nvSpPr>
+          <p:cNvPr id="3" name="TextBox 24"/>
+          <p:cNvSpPr txBox="1"/>
+          <p:nvPr/>
+        </p:nvSpPr>
+        <p:spPr>
+          <a:xfrm>
+            <a:off x="640080" y="777240"/>
+            <a:ext cx="10911535" cy="731520"/>
+          </a:xfrm>
+          <a:prstGeom prst="rect">
+            <a:avLst/>
+          </a:prstGeom>
+          <a:noFill/>
+        </p:spPr>
+        <p:txBody>
+          <a:bodyPr wrap="square" lIns="0" rIns="0" tIns="0" bIns="0">
+            <a:spAutoFit/>
+          </a:bodyPr>
+          <a:lstStyle/>
+          <a:p>
+            <a:pPr algn="l"/>
+            <a:r>
+              <a:rPr sz="3000" b="1" i="0">
+                <a:solidFill>
+                  <a:srgbClr val="1B2A4A"/>
+                </a:solidFill>
+                <a:latin typeface="Calibri"/>
+              </a:rPr>
+              <a:t>Não é o fenômeno — são duas variáveis reais</a:t>
+            </a:r>
+          </a:p>
+        </p:txBody>
+      </p:sp>
+      <p:sp>
+        <p:nvSpPr>
+          <p:cNvPr id="4" name="Rounded Rectangle 4"/>
+          <p:cNvSpPr/>
+          <p:nvPr/>
+        </p:nvSpPr>
+        <p:spPr>
+          <a:xfrm>
+            <a:off x="640080" y="1600200"/>
+            <a:ext cx="5212080" cy="3246120"/>
+          </a:xfrm>
+          <a:prstGeom prst="roundRect">
+            <a:avLst>
+              <a:gd name="adj" fmla="val 6000"/>
+            </a:avLst>
+          </a:prstGeom>
+          <a:solidFill>
+            <a:srgbClr val="F6F7F9"/>
+          </a:solidFill>
+          <a:ln>
+            <a:noFill/>
+          </a:ln>
+          <a:effectLst/>
+        </p:spPr>
+        <p:style>
+          <a:lnRef idx="1">
+            <a:schemeClr val="accent1"/>
+          </a:lnRef>
+          <a:fillRef idx="3">
+            <a:schemeClr val="accent1"/>
+          </a:fillRef>
+          <a:effectRef idx="2">
+            <a:schemeClr val="accent1"/>
+          </a:effectRef>
+          <a:fontRef idx="minor">
+            <a:schemeClr val="lt1"/>
+          </a:fontRef>
+        </p:style>
+        <p:txBody>
+          <a:bodyPr rtlCol="0" anchor="ctr"/>
+          <a:lstStyle/>
+          <a:p>
+            <a:pPr algn="ctr"/>
+          </a:p>
+        </p:txBody>
+      </p:sp>
+      <p:sp>
+        <p:nvSpPr>
+          <p:cNvPr id="5" name="Rounded Rectangle 5"/>
+          <p:cNvSpPr/>
+          <p:nvPr/>
+        </p:nvSpPr>
+        <p:spPr>
+          <a:xfrm>
+            <a:off x="914400" y="1856232"/>
+            <a:ext cx="2822000" cy="365760"/>
+          </a:xfrm>
+          <a:prstGeom prst="roundRect">
+            <a:avLst>
+              <a:gd name="adj" fmla="val 50000"/>
+            </a:avLst>
+          </a:prstGeom>
+          <a:solidFill>
+            <a:srgbClr val="FDECE0"/>
+          </a:solidFill>
+          <a:ln>
+            <a:noFill/>
+          </a:ln>
+          <a:effectLst/>
+        </p:spPr>
+        <p:style>
+          <a:lnRef idx="1">
+            <a:schemeClr val="accent1"/>
+          </a:lnRef>
+          <a:fillRef idx="3">
+            <a:schemeClr val="accent1"/>
+          </a:fillRef>
+          <a:effectRef idx="2">
+            <a:schemeClr val="accent1"/>
+          </a:effectRef>
+          <a:fontRef idx="minor">
+            <a:schemeClr val="lt1"/>
+          </a:fontRef>
+        </p:style>
+        <p:txBody>
+          <a:bodyPr rtlCol="0" anchor="ctr" wrap="square" lIns="228600" rIns="228600"/>
+          <a:lstStyle/>
+          <a:p>
+            <a:pPr algn="ctr"/>
+            <a:r>
+              <a:rPr sz="1200" b="1" i="0">
+                <a:solidFill>
+                  <a:srgbClr val="E8590C"/>
+                </a:solidFill>
+                <a:latin typeface="Calibri"/>
+              </a:rPr>
+              <a:t>FATOR 1 — TAMANHO</a:t>
+            </a:r>
+          </a:p>
+        </p:txBody>
+      </p:sp>
+      <p:sp>
+        <p:nvSpPr>
+          <p:cNvPr id="6" name="TextBox 6"/>
+          <p:cNvSpPr txBox="1"/>
+          <p:nvPr/>
+        </p:nvSpPr>
+        <p:spPr>
+          <a:xfrm>
+            <a:off x="914400" y="2331720"/>
+            <a:ext cx="4663440" cy="365760"/>
+          </a:xfrm>
+          <a:prstGeom prst="rect">
+            <a:avLst/>
+          </a:prstGeom>
+          <a:noFill/>
+        </p:spPr>
+        <p:txBody>
+          <a:bodyPr wrap="square" lIns="0" rIns="0" tIns="0" bIns="0">
+            <a:spAutoFit/>
+          </a:bodyPr>
+          <a:lstStyle/>
+          <a:p>
+            <a:pPr algn="l"/>
+            <a:r>
+              <a:rPr sz="1450" b="1" i="0">
+                <a:solidFill>
+                  <a:srgbClr val="1B2A4A"/>
+                </a:solidFill>
+                <a:latin typeface="Calibri"/>
+              </a:rPr>
+              <a:t>Razão de expansão do texto</a:t>
+            </a:r>
+          </a:p>
+        </p:txBody>
+      </p:sp>
+      <p:sp>
+        <p:nvSpPr>
+          <p:cNvPr id="7" name="TextBox 7"/>
+          <p:cNvSpPr txBox="1"/>
+          <p:nvPr/>
+        </p:nvSpPr>
+        <p:spPr>
+          <a:xfrm>
+            <a:off x="914400" y="2770632"/>
+            <a:ext cx="4663440" cy="777240"/>
+          </a:xfrm>
+          <a:prstGeom prst="rect">
+            <a:avLst/>
+          </a:prstGeom>
+          <a:noFill/>
+        </p:spPr>
+        <p:txBody>
+          <a:bodyPr wrap="square" lIns="0" rIns="0" tIns="0" bIns="0">
+            <a:spAutoFit/>
+          </a:bodyPr>
+          <a:lstStyle/>
+          <a:p>
+            <a:pPr algn="l">
+              <a:lnSpc>
+                <a:spcPct val="110000"/>
+              </a:lnSpc>
+            </a:pPr>
+            <a:r>
+              <a:rPr sz="1200" b="0" i="1">
+                <a:solidFill>
+                  <a:srgbClr val="495057"/>
+                </a:solidFill>
+                <a:latin typeface="Calibri"/>
+              </a:rPr>
+              <a:t>Quanto mais a versão simplificada precisa se alongar, proporcionalmente, para compensar a figura retórica removida</a:t>
+            </a:r>
+          </a:p>
+        </p:txBody>
+      </p:sp>
+      <p:sp>
+        <p:nvSpPr>
+          <p:cNvPr id="8" name="TextBox 8"/>
+          <p:cNvSpPr txBox="1"/>
+          <p:nvPr/>
+        </p:nvSpPr>
+        <p:spPr>
+          <a:xfrm>
+            <a:off x="914400" y="3593592"/>
+            <a:ext cx="4663440" cy="548640"/>
+          </a:xfrm>
+          <a:prstGeom prst="rect">
+            <a:avLst/>
+          </a:prstGeom>
+          <a:noFill/>
+        </p:spPr>
+        <p:txBody>
+          <a:bodyPr wrap="square" lIns="0" rIns="0" tIns="0" bIns="0">
+            <a:spAutoFit/>
+          </a:bodyPr>
+          <a:lstStyle/>
+          <a:p>
+            <a:pPr algn="l">
+              <a:lnSpc>
+                <a:spcPct val="110000"/>
+              </a:lnSpc>
+            </a:pPr>
+            <a:r>
+              <a:rPr sz="1200" b="0" i="0">
+                <a:solidFill>
+                  <a:srgbClr val="495057"/>
+                </a:solidFill>
+                <a:latin typeface="Calibri"/>
+              </a:rPr>
+              <a:t>→ correlação negativa moderada, nos três modelos, entre razão de tamanho e similaridade</a:t>
+            </a:r>
+          </a:p>
+        </p:txBody>
+      </p:sp>
+      <p:sp>
+        <p:nvSpPr>
+          <p:cNvPr id="11" name="TextBox 11"/>
+          <p:cNvSpPr txBox="1"/>
+          <p:nvPr/>
+        </p:nvSpPr>
+        <p:spPr>
+          <a:xfrm>
+            <a:off x="914400" y="4297680"/>
+            <a:ext cx="4663440" cy="365760"/>
+          </a:xfrm>
+          <a:prstGeom prst="rect">
+            <a:avLst/>
+          </a:prstGeom>
+          <a:noFill/>
+        </p:spPr>
+        <p:txBody>
+          <a:bodyPr wrap="square" lIns="0" rIns="0" tIns="0" bIns="0">
+            <a:spAutoFit/>
+          </a:bodyPr>
+          <a:lstStyle/>
+          <a:p>
+            <a:pPr algn="l"/>
+            <a:r>
+              <a:rPr sz="1250" b="1" i="0">
+                <a:solidFill>
+                  <a:srgbClr val="E8590C"/>
+                </a:solidFill>
+                <a:latin typeface="Calibri"/>
+              </a:rPr>
+              <a:t>r ≈ -0,43 a -0,47  ·  p &lt; 0,05 (3 modelos)</a:t>
+            </a:r>
+          </a:p>
+        </p:txBody>
+      </p:sp>
+      <p:sp>
+        <p:nvSpPr>
+          <p:cNvPr id="12" name="Rounded Rectangle 12"/>
+          <p:cNvSpPr/>
+          <p:nvPr/>
+        </p:nvSpPr>
+        <p:spPr>
+          <a:xfrm>
+            <a:off x="6309360" y="1600200"/>
+            <a:ext cx="5212080" cy="3246120"/>
+          </a:xfrm>
+          <a:prstGeom prst="roundRect">
+            <a:avLst>
+              <a:gd name="adj" fmla="val 6000"/>
+            </a:avLst>
+          </a:prstGeom>
+          <a:solidFill>
+            <a:srgbClr val="F6F7F9"/>
+          </a:solidFill>
+          <a:ln>
+            <a:noFill/>
+          </a:ln>
+          <a:effectLst/>
+        </p:spPr>
+        <p:style>
+          <a:lnRef idx="1">
+            <a:schemeClr val="accent1"/>
+          </a:lnRef>
+          <a:fillRef idx="3">
+            <a:schemeClr val="accent1"/>
+          </a:fillRef>
+          <a:effectRef idx="2">
+            <a:schemeClr val="accent1"/>
+          </a:effectRef>
+          <a:fontRef idx="minor">
+            <a:schemeClr val="lt1"/>
+          </a:fontRef>
+        </p:style>
+        <p:txBody>
+          <a:bodyPr rtlCol="0" anchor="ctr"/>
+          <a:lstStyle/>
+          <a:p>
+            <a:pPr algn="ctr"/>
+          </a:p>
+        </p:txBody>
+      </p:sp>
+      <p:sp>
+        <p:nvSpPr>
+          <p:cNvPr id="13" name="Rounded Rectangle 13"/>
+          <p:cNvSpPr/>
+          <p:nvPr/>
+        </p:nvSpPr>
+        <p:spPr>
+          <a:xfrm>
+            <a:off x="6583680" y="1856232"/>
+            <a:ext cx="2822000" cy="365760"/>
+          </a:xfrm>
+          <a:prstGeom prst="roundRect">
+            <a:avLst>
+              <a:gd name="adj" fmla="val 50000"/>
+            </a:avLst>
+          </a:prstGeom>
+          <a:solidFill>
+            <a:srgbClr val="FDECE0"/>
+          </a:solidFill>
+          <a:ln>
+            <a:noFill/>
+          </a:ln>
+          <a:effectLst/>
+        </p:spPr>
+        <p:style>
+          <a:lnRef idx="1">
+            <a:schemeClr val="accent1"/>
+          </a:lnRef>
+          <a:fillRef idx="3">
+            <a:schemeClr val="accent1"/>
+          </a:fillRef>
+          <a:effectRef idx="2">
+            <a:schemeClr val="accent1"/>
+          </a:effectRef>
+          <a:fontRef idx="minor">
+            <a:schemeClr val="lt1"/>
+          </a:fontRef>
+        </p:style>
+        <p:txBody>
+          <a:bodyPr rtlCol="0" anchor="ctr" wrap="square" lIns="228600" rIns="228600"/>
+          <a:lstStyle/>
+          <a:p>
+            <a:pPr algn="ctr"/>
+            <a:r>
+              <a:rPr sz="1200" b="1" i="0">
+                <a:solidFill>
+                  <a:srgbClr val="E8590C"/>
+                </a:solidFill>
+                <a:latin typeface="Calibri"/>
+              </a:rPr>
+              <a:t>FATOR 2 — CONTEXTO</a:t>
+            </a:r>
+          </a:p>
+        </p:txBody>
+      </p:sp>
+      <p:sp>
+        <p:nvSpPr>
+          <p:cNvPr id="14" name="TextBox 14"/>
+          <p:cNvSpPr txBox="1"/>
+          <p:nvPr/>
+        </p:nvSpPr>
+        <p:spPr>
+          <a:xfrm>
+            <a:off x="6583680" y="2331720"/>
+            <a:ext cx="4663440" cy="365760"/>
+          </a:xfrm>
+          <a:prstGeom prst="rect">
+            <a:avLst/>
+          </a:prstGeom>
+          <a:noFill/>
+        </p:spPr>
+        <p:txBody>
+          <a:bodyPr wrap="square" lIns="0" rIns="0" tIns="0" bIns="0">
+            <a:spAutoFit/>
+          </a:bodyPr>
+          <a:lstStyle/>
+          <a:p>
+            <a:pPr algn="l"/>
+            <a:r>
+              <a:rPr sz="1450" b="1" i="0">
+                <a:solidFill>
+                  <a:srgbClr val="1B2A4A"/>
+                </a:solidFill>
+                <a:latin typeface="Calibri"/>
+              </a:rPr>
+              <a:t>Dependência de contexto ausente</a:t>
+            </a:r>
+          </a:p>
+        </p:txBody>
+      </p:sp>
+      <p:sp>
+        <p:nvSpPr>
+          <p:cNvPr id="15" name="TextBox 15"/>
+          <p:cNvSpPr txBox="1"/>
+          <p:nvPr/>
+        </p:nvSpPr>
+        <p:spPr>
+          <a:xfrm>
+            <a:off x="6583680" y="2770632"/>
+            <a:ext cx="4663440" cy="777240"/>
+          </a:xfrm>
+          <a:prstGeom prst="rect">
+            <a:avLst/>
+          </a:prstGeom>
+          <a:noFill/>
+        </p:spPr>
+        <p:txBody>
+          <a:bodyPr wrap="square" lIns="0" rIns="0" tIns="0" bIns="0">
+            <a:spAutoFit/>
+          </a:bodyPr>
+          <a:lstStyle/>
+          <a:p>
+            <a:pPr algn="l">
+              <a:lnSpc>
+                <a:spcPct val="110000"/>
+              </a:lnSpc>
+            </a:pPr>
+            <a:r>
+              <a:rPr sz="1200" b="0" i="1">
+                <a:solidFill>
+                  <a:srgbClr val="495057"/>
+                </a:solidFill>
+                <a:latin typeface="Calibri"/>
+              </a:rPr>
+              <a:t>Controlando estatisticamente pela razão de tamanho, numa regressão múltipla com os dois fatores juntos</a:t>
+            </a:r>
+          </a:p>
+        </p:txBody>
+      </p:sp>
+      <p:sp>
+        <p:nvSpPr>
+          <p:cNvPr id="16" name="TextBox 16"/>
+          <p:cNvSpPr txBox="1"/>
+          <p:nvPr/>
+        </p:nvSpPr>
+        <p:spPr>
+          <a:xfrm>
+            <a:off x="6583680" y="3593592"/>
+            <a:ext cx="4663440" cy="548640"/>
+          </a:xfrm>
+          <a:prstGeom prst="rect">
+            <a:avLst/>
+          </a:prstGeom>
+          <a:noFill/>
+        </p:spPr>
+        <p:txBody>
+          <a:bodyPr wrap="square" lIns="0" rIns="0" tIns="0" bIns="0">
+            <a:spAutoFit/>
+          </a:bodyPr>
+          <a:lstStyle/>
+          <a:p>
+            <a:pPr algn="l">
+              <a:lnSpc>
+                <a:spcPct val="110000"/>
+              </a:lnSpc>
+            </a:pPr>
+            <a:r>
+              <a:rPr sz="1200" b="0" i="0">
+                <a:solidFill>
+                  <a:srgbClr val="495057"/>
+                </a:solidFill>
+                <a:latin typeface="Calibri"/>
+              </a:rPr>
+              <a:t>→ continua reduzindo a similaridade mesmo controlando pelo tamanho</a:t>
+            </a:r>
+          </a:p>
+        </p:txBody>
+      </p:sp>
+      <p:sp>
+        <p:nvSpPr>
+          <p:cNvPr id="19" name="TextBox 19"/>
+          <p:cNvSpPr txBox="1"/>
+          <p:nvPr/>
+        </p:nvSpPr>
+        <p:spPr>
+          <a:xfrm>
+            <a:off x="6583680" y="4297680"/>
+            <a:ext cx="4663440" cy="365760"/>
+          </a:xfrm>
+          <a:prstGeom prst="rect">
+            <a:avLst/>
+          </a:prstGeom>
+          <a:noFill/>
+        </p:spPr>
+        <p:txBody>
+          <a:bodyPr wrap="square" lIns="0" rIns="0" tIns="0" bIns="0">
+            <a:spAutoFit/>
+          </a:bodyPr>
+          <a:lstStyle/>
+          <a:p>
+            <a:pPr algn="l"/>
+            <a:r>
+              <a:rPr sz="1250" b="1" i="0">
+                <a:solidFill>
+                  <a:srgbClr val="E8590C"/>
+                </a:solidFill>
+                <a:latin typeface="Calibri"/>
+              </a:rPr>
+              <a:t>p ≈ 0,007 a 0,035  ·  R² 0,35–0,42</a:t>
+            </a:r>
+          </a:p>
+        </p:txBody>
+      </p:sp>
+      <p:sp>
+        <p:nvSpPr>
+          <p:cNvPr id="20" name="Rounded Rectangle 20"/>
+          <p:cNvSpPr/>
+          <p:nvPr/>
+        </p:nvSpPr>
+        <p:spPr>
+          <a:xfrm>
+            <a:off x="640080" y="5532120"/>
+            <a:ext cx="10911535" cy="777240"/>
+          </a:xfrm>
+          <a:prstGeom prst="roundRect">
+            <a:avLst>
+              <a:gd name="adj" fmla="val 10000"/>
+            </a:avLst>
+          </a:prstGeom>
+          <a:solidFill>
+            <a:srgbClr val="E7ECFC"/>
+          </a:solidFill>
+          <a:ln>
+            <a:noFill/>
+          </a:ln>
+          <a:effectLst/>
+        </p:spPr>
+        <p:style>
+          <a:lnRef idx="1">
+            <a:schemeClr val="accent1"/>
+          </a:lnRef>
+          <a:fillRef idx="3">
+            <a:schemeClr val="accent1"/>
+          </a:fillRef>
+          <a:effectRef idx="2">
+            <a:schemeClr val="accent1"/>
+          </a:effectRef>
+          <a:fontRef idx="minor">
+            <a:schemeClr val="lt1"/>
+          </a:fontRef>
+        </p:style>
+        <p:txBody>
+          <a:bodyPr rtlCol="0" anchor="ctr" wrap="square" lIns="320040" rIns="320040"/>
+          <a:lstStyle/>
+          <a:p>
+            <a:pPr algn="l">
+              <a:lnSpc>
+                <a:spcPct val="115000"/>
+              </a:lnSpc>
+            </a:pPr>
+            <a:r>
+              <a:rPr sz="1300" b="0" i="1">
+                <a:solidFill>
+                  <a:srgbClr val="1B2A4A"/>
+                </a:solidFill>
+                <a:latin typeface="Calibri"/>
+              </a:rPr>
+              <a:t>Numa regressão múltipla com os dois fatores juntos, ambos seguem estatisticamente significativos controlando um pelo outro — evidência de que são majoritariamente independentes, não um mascarando o outro. Com n=25 e 2 preditores (22 graus de liberdade residuais), é indicativo, não conclusivo.</a:t>
+            </a:r>
+          </a:p>
+        </p:txBody>
+      </p:sp>
+      <p:sp>
+        <p:nvSpPr>
+          <p:cNvPr id="21" name="TextBox 21"/>
+          <p:cNvSpPr txBox="1"/>
+          <p:nvPr/>
+        </p:nvSpPr>
+        <p:spPr>
+          <a:xfrm>
+            <a:off x="640080" y="6400800"/>
+            <a:ext cx="5486400" cy="320040"/>
+          </a:xfrm>
+          <a:prstGeom prst="rect">
+            <a:avLst/>
+          </a:prstGeom>
+          <a:noFill/>
+        </p:spPr>
+        <p:txBody>
+          <a:bodyPr wrap="square" lIns="0" rIns="0" tIns="0" bIns="0">
+            <a:spAutoFit/>
+          </a:bodyPr>
+          <a:lstStyle/>
+          <a:p>
+            <a:pPr algn="l"/>
+            <a:r>
+              <a:rPr sz="1000" b="0" i="0">
+                <a:solidFill>
+                  <a:srgbClr val="868E96"/>
+                </a:solidFill>
+                <a:latin typeface="Calibri"/>
+              </a:rPr>
+              <a:t>Laboratório de Estresse Semântico</a:t>
+            </a:r>
+          </a:p>
+        </p:txBody>
+      </p:sp>
+      <p:sp>
+        <p:nvSpPr>
+          <p:cNvPr id="22" name="TextBox 22"/>
+          <p:cNvSpPr txBox="1"/>
+          <p:nvPr/>
+        </p:nvSpPr>
+        <p:spPr>
+          <a:xfrm>
+            <a:off x="10637215" y="6400800"/>
+            <a:ext cx="914400" cy="320040"/>
+          </a:xfrm>
+          <a:prstGeom prst="rect">
+            <a:avLst/>
+          </a:prstGeom>
+          <a:noFill/>
+        </p:spPr>
+        <p:txBody>
+          <a:bodyPr wrap="square" lIns="0" rIns="0" tIns="0" bIns="0">
+            <a:spAutoFit/>
+          </a:bodyPr>
+          <a:lstStyle/>
+          <a:p>
+            <a:pPr algn="r"/>
+            <a:r>
+              <a:rPr sz="1000" b="0" i="0">
+                <a:solidFill>
+                  <a:srgbClr val="868E96"/>
+                </a:solidFill>
+                <a:latin typeface="Calibri"/>
+              </a:rPr>
+              <a:t>12</a:t>
+            </a:r>
+          </a:p>
+        </p:txBody>
+      </p:sp>
+    </p:spTree>
+  </p:cSld>
+  <p:clrMapOvr>
+    <a:masterClrMapping/>
+  </p:clrMapOvr>
+</p:sld>
+</file>
+
 <file path=ppt/slides/slide2.xml><?xml version="1.0" encoding="utf-8"?>
 <p:sld xmlns:a="http://schemas.openxmlformats.org/drawingml/2006/main" xmlns:p="http://schemas.openxmlformats.org/presentationml/2006/main" xmlns:r="http://schemas.openxmlformats.org/officeDocument/2006/relationships">
   <p:cSld>
@@ -9315,7 +10039,7 @@
                 </a:solidFill>
                 <a:latin typeface="Calibri"/>
               </a:rPr>
-              <a:t>Achado preliminar: os modelos de embedding parecem depender mais da forma da frase do que seria ideal.</a:t>
+              <a:t>Leitura preliminar, baseada em n=1 por fenômeno: como os próximos slides mostram, essa hierarquia por categoria retórica não se sustentou com mais dados — o que de fato explica a queda é o contexto ausente e o tamanho da reescrita, não a figura em si.</a:t>
             </a:r>
           </a:p>
         </p:txBody>
@@ -9664,7 +10388,7 @@
             <a:avLst/>
           </a:prstGeom>
           <a:solidFill>
-            <a:srgbClr val="3B5BDB"/>
+            <a:srgbClr val="0CA678"/>
           </a:solidFill>
           <a:ln>
             <a:noFill/>
@@ -9732,7 +10456,7 @@
                 </a:solidFill>
                 <a:latin typeface="Calibri"/>
               </a:rPr>
-              <a:t>Testar correlação com o tamanho do texto</a:t>
+              <a:t>Testar correlação com o tamanho do texto (concluído)</a:t>
             </a:r>
           </a:p>
         </p:txBody>
@@ -9771,7 +10495,7 @@
                 </a:solidFill>
                 <a:latin typeface="Calibri"/>
               </a:rPr>
-              <a:t>Verificar se a extensão do fragmento, por si só, explica parte da deriva observada.</a:t>
+              <a:t>A diferença absoluta de caracteres não correlaciona com a similaridade, mas a razão de expansão (simplificado / original) sim: r ≈ -0,43 a -0,47, p &lt; 0,05 nos três modelos (Seção 8.1).</a:t>
             </a:r>
           </a:p>
         </p:txBody>
@@ -9827,7 +10551,7 @@
             <a:avLst/>
           </a:prstGeom>
           <a:solidFill>
-            <a:srgbClr val="3B5BDB"/>
+            <a:srgbClr val="0CA678"/>
           </a:solidFill>
           <a:ln>
             <a:noFill/>
@@ -9895,7 +10619,7 @@
                 </a:solidFill>
                 <a:latin typeface="Calibri"/>
               </a:rPr>
-              <a:t>Análise estatística mais robusta</a:t>
+              <a:t>Regressão múltipla: dois fatores independentes (concluído)</a:t>
             </a:r>
           </a:p>
         </p:txBody>
@@ -9934,7 +10658,7 @@
                 </a:solidFill>
                 <a:latin typeface="Calibri"/>
               </a:rPr>
-              <a:t>Com n=25, Paradoxo, Antítese, Hipérbato e Zeugma já têm múltiplas observações (Seção 8) — e a hierarquia original não se sustentou. Falta balancear autocontido/dependente de contexto dentro de cada fenômeno para separar os dois efeitos.</a:t>
+              <a:t>Controlando dependência de contexto e razão de tamanho um pelo outro, os dois seguem significativos (R² 0,35–0,42) — evidência de que são majoritariamente independentes, não uma hierarquia de fenômenos retóricos. Com n=25 e 2 preditores (22 gl residuais), falta um dataset maior e balanceado (categoria × contexto × tamanho) para separar os efeitos com mais poder estatístico.</a:t>
             </a:r>
           </a:p>
         </p:txBody>
@@ -10004,7 +10728,7 @@
                 </a:solidFill>
                 <a:latin typeface="Calibri"/>
               </a:rPr>
-              <a:t>12</a:t>
+              <a:t>13</a:t>
             </a:r>
           </a:p>
         </p:txBody>

--- a/apresentacao/laboratorio_estresse_semantico.pptx
+++ b/apresentacao/laboratorio_estresse_semantico.pptx
@@ -17,6 +17,7 @@
     <p:sldId id="266" r:id="rId17"/>
     <p:sldId id="267" r:id="rId18"/>
     <p:sldId id="268" r:id="rId19"/>
+    <p:sldId id="269" r:id="rId20"/>
     <p:sldId id="262" r:id="rId13"/>
   </p:sldIdLst>
   <p:sldSz cx="12191695" cy="6858000" type="screen4x3"/>
@@ -6458,6 +6459,729 @@
 </p:sld>
 </file>
 
+<file path=ppt/slides/slide14.xml><?xml version="1.0" encoding="utf-8"?>
+<p:sld xmlns:a="http://schemas.openxmlformats.org/drawingml/2006/main" xmlns:p="http://schemas.openxmlformats.org/presentationml/2006/main" xmlns:r="http://schemas.openxmlformats.org/officeDocument/2006/relationships">
+  <p:cSld>
+    <p:bg>
+      <p:bgPr>
+        <a:solidFill>
+          <a:srgbClr val="FFFFFF"/>
+        </a:solidFill>
+        <a:effectLst/>
+      </p:bgPr>
+    </p:bg>
+    <p:spTree>
+      <p:nvGrpSpPr>
+        <p:cNvPr id="1" name=""/>
+        <p:cNvGrpSpPr/>
+        <p:nvPr/>
+      </p:nvGrpSpPr>
+      <p:grpSpPr/>
+      <p:sp>
+        <p:nvSpPr>
+          <p:cNvPr id="2" name="TextBox 23"/>
+          <p:cNvSpPr txBox="1"/>
+          <p:nvPr/>
+        </p:nvSpPr>
+        <p:spPr>
+          <a:xfrm>
+            <a:off x="640080" y="411480"/>
+            <a:ext cx="10911535" cy="320040"/>
+          </a:xfrm>
+          <a:prstGeom prst="rect">
+            <a:avLst/>
+          </a:prstGeom>
+          <a:noFill/>
+        </p:spPr>
+        <p:txBody>
+          <a:bodyPr wrap="square" lIns="0" rIns="0" tIns="0" bIns="0">
+            <a:spAutoFit/>
+          </a:bodyPr>
+          <a:lstStyle/>
+          <a:p>
+            <a:pPr algn="l"/>
+            <a:r>
+              <a:rPr sz="1200" b="1" i="0">
+                <a:solidFill>
+                  <a:srgbClr val="3B5BDB"/>
+                </a:solidFill>
+                <a:latin typeface="Calibri"/>
+              </a:rPr>
+              <a:t>IMPLICAÇÃO PRÁTICA</a:t>
+            </a:r>
+          </a:p>
+        </p:txBody>
+      </p:sp>
+      <p:sp>
+        <p:nvSpPr>
+          <p:cNvPr id="3" name="TextBox 24"/>
+          <p:cNvSpPr txBox="1"/>
+          <p:nvPr/>
+        </p:nvSpPr>
+        <p:spPr>
+          <a:xfrm>
+            <a:off x="640080" y="777240"/>
+            <a:ext cx="10911535" cy="731520"/>
+          </a:xfrm>
+          <a:prstGeom prst="rect">
+            <a:avLst/>
+          </a:prstGeom>
+          <a:noFill/>
+        </p:spPr>
+        <p:txBody>
+          <a:bodyPr wrap="square" lIns="0" rIns="0" tIns="0" bIns="0">
+            <a:spAutoFit/>
+          </a:bodyPr>
+          <a:lstStyle/>
+          <a:p>
+            <a:pPr algn="l"/>
+            <a:r>
+              <a:rPr sz="3000" b="1" i="0">
+                <a:solidFill>
+                  <a:srgbClr val="1B2A4A"/>
+                </a:solidFill>
+                <a:latin typeface="Calibri"/>
+              </a:rPr>
+              <a:t>O que isso sugere para IA sobre documentos (RAG)</a:t>
+            </a:r>
+          </a:p>
+        </p:txBody>
+      </p:sp>
+      <p:sp>
+        <p:nvSpPr>
+          <p:cNvPr id="4" name="Rounded Rectangle 4"/>
+          <p:cNvSpPr/>
+          <p:nvPr/>
+        </p:nvSpPr>
+        <p:spPr>
+          <a:xfrm>
+            <a:off x="640080" y="1600200"/>
+            <a:ext cx="5212080" cy="3246120"/>
+          </a:xfrm>
+          <a:prstGeom prst="roundRect">
+            <a:avLst>
+              <a:gd name="adj" fmla="val 6000"/>
+            </a:avLst>
+          </a:prstGeom>
+          <a:solidFill>
+            <a:srgbClr val="F6F7F9"/>
+          </a:solidFill>
+          <a:ln>
+            <a:noFill/>
+          </a:ln>
+          <a:effectLst/>
+        </p:spPr>
+        <p:style>
+          <a:lnRef idx="1">
+            <a:schemeClr val="accent1"/>
+          </a:lnRef>
+          <a:fillRef idx="3">
+            <a:schemeClr val="accent1"/>
+          </a:fillRef>
+          <a:effectRef idx="2">
+            <a:schemeClr val="accent1"/>
+          </a:effectRef>
+          <a:fontRef idx="minor">
+            <a:schemeClr val="lt1"/>
+          </a:fontRef>
+        </p:style>
+        <p:txBody>
+          <a:bodyPr rtlCol="0" anchor="ctr"/>
+          <a:lstStyle/>
+          <a:p>
+            <a:pPr algn="ctr"/>
+          </a:p>
+        </p:txBody>
+      </p:sp>
+      <p:sp>
+        <p:nvSpPr>
+          <p:cNvPr id="5" name="Rounded Rectangle 5"/>
+          <p:cNvSpPr/>
+          <p:nvPr/>
+        </p:nvSpPr>
+        <p:spPr>
+          <a:xfrm>
+            <a:off x="914400" y="1856232"/>
+            <a:ext cx="2822000" cy="365760"/>
+          </a:xfrm>
+          <a:prstGeom prst="roundRect">
+            <a:avLst>
+              <a:gd name="adj" fmla="val 50000"/>
+            </a:avLst>
+          </a:prstGeom>
+          <a:solidFill>
+            <a:srgbClr val="FDECE0"/>
+          </a:solidFill>
+          <a:ln>
+            <a:noFill/>
+          </a:ln>
+          <a:effectLst/>
+        </p:spPr>
+        <p:style>
+          <a:lnRef idx="1">
+            <a:schemeClr val="accent1"/>
+          </a:lnRef>
+          <a:fillRef idx="3">
+            <a:schemeClr val="accent1"/>
+          </a:fillRef>
+          <a:effectRef idx="2">
+            <a:schemeClr val="accent1"/>
+          </a:effectRef>
+          <a:fontRef idx="minor">
+            <a:schemeClr val="lt1"/>
+          </a:fontRef>
+        </p:style>
+        <p:txBody>
+          <a:bodyPr rtlCol="0" anchor="ctr" wrap="square" lIns="228600" rIns="228600"/>
+          <a:lstStyle/>
+          <a:p>
+            <a:pPr algn="ctr"/>
+            <a:r>
+              <a:rPr sz="1200" b="1" i="0">
+                <a:solidFill>
+                  <a:srgbClr val="E8590C"/>
+                </a:solidFill>
+                <a:latin typeface="Calibri"/>
+              </a:rPr>
+              <a:t>COMO FUNCIONA UM RAG</a:t>
+            </a:r>
+          </a:p>
+        </p:txBody>
+      </p:sp>
+      <p:sp>
+        <p:nvSpPr>
+          <p:cNvPr id="6" name="TextBox 6"/>
+          <p:cNvSpPr txBox="1"/>
+          <p:nvPr/>
+        </p:nvSpPr>
+        <p:spPr>
+          <a:xfrm>
+            <a:off x="914400" y="2331720"/>
+            <a:ext cx="4663440" cy="365760"/>
+          </a:xfrm>
+          <a:prstGeom prst="rect">
+            <a:avLst/>
+          </a:prstGeom>
+          <a:noFill/>
+        </p:spPr>
+        <p:txBody>
+          <a:bodyPr wrap="square" lIns="0" rIns="0" tIns="0" bIns="0">
+            <a:spAutoFit/>
+          </a:bodyPr>
+          <a:lstStyle/>
+          <a:p>
+            <a:pPr algn="l"/>
+            <a:r>
+              <a:rPr sz="1450" b="1" i="0">
+                <a:solidFill>
+                  <a:srgbClr val="1B2A4A"/>
+                </a:solidFill>
+                <a:latin typeface="Calibri"/>
+              </a:rPr>
+              <a:t>Busca por embedding decide o que o LLM lê</a:t>
+            </a:r>
+          </a:p>
+        </p:txBody>
+      </p:sp>
+      <p:sp>
+        <p:nvSpPr>
+          <p:cNvPr id="7" name="TextBox 7"/>
+          <p:cNvSpPr txBox="1"/>
+          <p:nvPr/>
+        </p:nvSpPr>
+        <p:spPr>
+          <a:xfrm>
+            <a:off x="914400" y="2770632"/>
+            <a:ext cx="4663440" cy="777240"/>
+          </a:xfrm>
+          <a:prstGeom prst="rect">
+            <a:avLst/>
+          </a:prstGeom>
+          <a:noFill/>
+        </p:spPr>
+        <p:txBody>
+          <a:bodyPr wrap="square" lIns="0" rIns="0" tIns="0" bIns="0">
+            <a:spAutoFit/>
+          </a:bodyPr>
+          <a:lstStyle/>
+          <a:p>
+            <a:pPr algn="l">
+              <a:lnSpc>
+                <a:spcPct val="110000"/>
+              </a:lnSpc>
+            </a:pPr>
+            <a:r>
+              <a:rPr sz="1200" b="0" i="1">
+                <a:solidFill>
+                  <a:srgbClr val="495057"/>
+                </a:solidFill>
+                <a:latin typeface="Calibri"/>
+              </a:rPr>
+              <a:t>Ferramentas que respondem sobre documentos longos (PDFs, livros) geralmente não mandam o texto inteiro ao modelo — quebram em pedaços (chunks) e recuperam só os mais similares à pergunta, por embedding</a:t>
+            </a:r>
+          </a:p>
+        </p:txBody>
+      </p:sp>
+      <p:sp>
+        <p:nvSpPr>
+          <p:cNvPr id="8" name="TextBox 8"/>
+          <p:cNvSpPr txBox="1"/>
+          <p:nvPr/>
+        </p:nvSpPr>
+        <p:spPr>
+          <a:xfrm>
+            <a:off x="914400" y="3593592"/>
+            <a:ext cx="4663440" cy="548640"/>
+          </a:xfrm>
+          <a:prstGeom prst="rect">
+            <a:avLst/>
+          </a:prstGeom>
+          <a:noFill/>
+        </p:spPr>
+        <p:txBody>
+          <a:bodyPr wrap="square" lIns="0" rIns="0" tIns="0" bIns="0">
+            <a:spAutoFit/>
+          </a:bodyPr>
+          <a:lstStyle/>
+          <a:p>
+            <a:pPr algn="l">
+              <a:lnSpc>
+                <a:spcPct val="110000"/>
+              </a:lnSpc>
+            </a:pPr>
+            <a:r>
+              <a:rPr sz="1200" b="0" i="0">
+                <a:solidFill>
+                  <a:srgbClr val="495057"/>
+                </a:solidFill>
+                <a:latin typeface="Calibri"/>
+              </a:rPr>
+              <a:t>→ um corte malfeito decide, antes do LLM entrar em ação, que ele nunca vai ver o trecho certo</a:t>
+            </a:r>
+          </a:p>
+        </p:txBody>
+      </p:sp>
+      <p:sp>
+        <p:nvSpPr>
+          <p:cNvPr id="11" name="TextBox 11"/>
+          <p:cNvSpPr txBox="1"/>
+          <p:nvPr/>
+        </p:nvSpPr>
+        <p:spPr>
+          <a:xfrm>
+            <a:off x="914400" y="4297680"/>
+            <a:ext cx="4663440" cy="365760"/>
+          </a:xfrm>
+          <a:prstGeom prst="rect">
+            <a:avLst/>
+          </a:prstGeom>
+          <a:noFill/>
+        </p:spPr>
+        <p:txBody>
+          <a:bodyPr wrap="square" lIns="0" rIns="0" tIns="0" bIns="0">
+            <a:spAutoFit/>
+          </a:bodyPr>
+          <a:lstStyle/>
+          <a:p>
+            <a:pPr algn="l"/>
+            <a:r>
+              <a:rPr sz="1250" b="1" i="0">
+                <a:solidFill>
+                  <a:srgbClr val="E8590C"/>
+                </a:solidFill>
+                <a:latin typeface="Calibri"/>
+              </a:rPr>
+              <a:t>a etapa de busca já erra antes do LLM começar</a:t>
+            </a:r>
+          </a:p>
+        </p:txBody>
+      </p:sp>
+      <p:sp>
+        <p:nvSpPr>
+          <p:cNvPr id="12" name="Rounded Rectangle 12"/>
+          <p:cNvSpPr/>
+          <p:nvPr/>
+        </p:nvSpPr>
+        <p:spPr>
+          <a:xfrm>
+            <a:off x="6309360" y="1600200"/>
+            <a:ext cx="5212080" cy="3246120"/>
+          </a:xfrm>
+          <a:prstGeom prst="roundRect">
+            <a:avLst>
+              <a:gd name="adj" fmla="val 6000"/>
+            </a:avLst>
+          </a:prstGeom>
+          <a:solidFill>
+            <a:srgbClr val="F6F7F9"/>
+          </a:solidFill>
+          <a:ln>
+            <a:noFill/>
+          </a:ln>
+          <a:effectLst/>
+        </p:spPr>
+        <p:style>
+          <a:lnRef idx="1">
+            <a:schemeClr val="accent1"/>
+          </a:lnRef>
+          <a:fillRef idx="3">
+            <a:schemeClr val="accent1"/>
+          </a:fillRef>
+          <a:effectRef idx="2">
+            <a:schemeClr val="accent1"/>
+          </a:effectRef>
+          <a:fontRef idx="minor">
+            <a:schemeClr val="lt1"/>
+          </a:fontRef>
+        </p:style>
+        <p:txBody>
+          <a:bodyPr rtlCol="0" anchor="ctr"/>
+          <a:lstStyle/>
+          <a:p>
+            <a:pPr algn="ctr"/>
+          </a:p>
+        </p:txBody>
+      </p:sp>
+      <p:sp>
+        <p:nvSpPr>
+          <p:cNvPr id="13" name="Rounded Rectangle 13"/>
+          <p:cNvSpPr/>
+          <p:nvPr/>
+        </p:nvSpPr>
+        <p:spPr>
+          <a:xfrm>
+            <a:off x="6583680" y="1856232"/>
+            <a:ext cx="2822000" cy="365760"/>
+          </a:xfrm>
+          <a:prstGeom prst="roundRect">
+            <a:avLst>
+              <a:gd name="adj" fmla="val 50000"/>
+            </a:avLst>
+          </a:prstGeom>
+          <a:solidFill>
+            <a:srgbClr val="FDECE0"/>
+          </a:solidFill>
+          <a:ln>
+            <a:noFill/>
+          </a:ln>
+          <a:effectLst/>
+        </p:spPr>
+        <p:style>
+          <a:lnRef idx="1">
+            <a:schemeClr val="accent1"/>
+          </a:lnRef>
+          <a:fillRef idx="3">
+            <a:schemeClr val="accent1"/>
+          </a:fillRef>
+          <a:effectRef idx="2">
+            <a:schemeClr val="accent1"/>
+          </a:effectRef>
+          <a:fontRef idx="minor">
+            <a:schemeClr val="lt1"/>
+          </a:fontRef>
+        </p:style>
+        <p:txBody>
+          <a:bodyPr rtlCol="0" anchor="ctr" wrap="square" lIns="228600" rIns="228600"/>
+          <a:lstStyle/>
+          <a:p>
+            <a:pPr algn="ctr"/>
+            <a:r>
+              <a:rPr sz="1200" b="1" i="0">
+                <a:solidFill>
+                  <a:srgbClr val="E8590C"/>
+                </a:solidFill>
+                <a:latin typeface="Calibri"/>
+              </a:rPr>
+              <a:t>ACHADO DESTE PROJETO</a:t>
+            </a:r>
+          </a:p>
+        </p:txBody>
+      </p:sp>
+      <p:sp>
+        <p:nvSpPr>
+          <p:cNvPr id="14" name="TextBox 14"/>
+          <p:cNvSpPr txBox="1"/>
+          <p:nvPr/>
+        </p:nvSpPr>
+        <p:spPr>
+          <a:xfrm>
+            <a:off x="6583680" y="2331720"/>
+            <a:ext cx="4663440" cy="365760"/>
+          </a:xfrm>
+          <a:prstGeom prst="rect">
+            <a:avLst/>
+          </a:prstGeom>
+          <a:noFill/>
+        </p:spPr>
+        <p:txBody>
+          <a:bodyPr wrap="square" lIns="0" rIns="0" tIns="0" bIns="0">
+            <a:spAutoFit/>
+          </a:bodyPr>
+          <a:lstStyle/>
+          <a:p>
+            <a:pPr algn="l"/>
+            <a:r>
+              <a:rPr sz="1450" b="1" i="0">
+                <a:solidFill>
+                  <a:srgbClr val="1B2A4A"/>
+                </a:solidFill>
+                <a:latin typeface="Calibri"/>
+              </a:rPr>
+              <a:t>Trecho cortado sem contexto = embedding degradado</a:t>
+            </a:r>
+          </a:p>
+        </p:txBody>
+      </p:sp>
+      <p:sp>
+        <p:nvSpPr>
+          <p:cNvPr id="15" name="TextBox 15"/>
+          <p:cNvSpPr txBox="1"/>
+          <p:nvPr/>
+        </p:nvSpPr>
+        <p:spPr>
+          <a:xfrm>
+            <a:off x="6583680" y="2770632"/>
+            <a:ext cx="4663440" cy="777240"/>
+          </a:xfrm>
+          <a:prstGeom prst="rect">
+            <a:avLst/>
+          </a:prstGeom>
+          <a:noFill/>
+        </p:spPr>
+        <p:txBody>
+          <a:bodyPr wrap="square" lIns="0" rIns="0" tIns="0" bIns="0">
+            <a:spAutoFit/>
+          </a:bodyPr>
+          <a:lstStyle/>
+          <a:p>
+            <a:pPr algn="l">
+              <a:lnSpc>
+                <a:spcPct val="110000"/>
+              </a:lnSpc>
+            </a:pPr>
+            <a:r>
+              <a:rPr sz="1200" b="0" i="1">
+                <a:solidFill>
+                  <a:srgbClr val="495057"/>
+                </a:solidFill>
+                <a:latin typeface="Calibri"/>
+              </a:rPr>
+              <a:t>Um conectivo pressuposicional (“mas ainda...”), uma referência não resolvida, uma citação sem o entorno — não é a complexidade do texto que derruba a similaridade, é o corte</a:t>
+            </a:r>
+          </a:p>
+        </p:txBody>
+      </p:sp>
+      <p:sp>
+        <p:nvSpPr>
+          <p:cNvPr id="16" name="TextBox 16"/>
+          <p:cNvSpPr txBox="1"/>
+          <p:nvPr/>
+        </p:nvSpPr>
+        <p:spPr>
+          <a:xfrm>
+            <a:off x="6583680" y="3593592"/>
+            <a:ext cx="4663440" cy="548640"/>
+          </a:xfrm>
+          <a:prstGeom prst="rect">
+            <a:avLst/>
+          </a:prstGeom>
+          <a:noFill/>
+        </p:spPr>
+        <p:txBody>
+          <a:bodyPr wrap="square" lIns="0" rIns="0" tIns="0" bIns="0">
+            <a:spAutoFit/>
+          </a:bodyPr>
+          <a:lstStyle/>
+          <a:p>
+            <a:pPr algn="l">
+              <a:lnSpc>
+                <a:spcPct val="110000"/>
+              </a:lnSpc>
+            </a:pPr>
+            <a:r>
+              <a:rPr sz="1200" b="0" i="0">
+                <a:solidFill>
+                  <a:srgbClr val="495057"/>
+                </a:solidFill>
+                <a:latin typeface="Calibri"/>
+              </a:rPr>
+              <a:t>→ o mesmo mecanismo medido aqui em literatura pode atuar em qualquer fronteira de chunk</a:t>
+            </a:r>
+          </a:p>
+        </p:txBody>
+      </p:sp>
+      <p:sp>
+        <p:nvSpPr>
+          <p:cNvPr id="19" name="TextBox 19"/>
+          <p:cNvSpPr txBox="1"/>
+          <p:nvPr/>
+        </p:nvSpPr>
+        <p:spPr>
+          <a:xfrm>
+            <a:off x="6583680" y="4297680"/>
+            <a:ext cx="4663440" cy="365760"/>
+          </a:xfrm>
+          <a:prstGeom prst="rect">
+            <a:avLst/>
+          </a:prstGeom>
+          <a:noFill/>
+        </p:spPr>
+        <p:txBody>
+          <a:bodyPr wrap="square" lIns="0" rIns="0" tIns="0" bIns="0">
+            <a:spAutoFit/>
+          </a:bodyPr>
+          <a:lstStyle/>
+          <a:p>
+            <a:pPr algn="l"/>
+            <a:r>
+              <a:rPr sz="1250" b="1" i="0">
+                <a:solidFill>
+                  <a:srgbClr val="E8590C"/>
+                </a:solidFill>
+                <a:latin typeface="Calibri"/>
+              </a:rPr>
+              <a:t>não é uma falha do LLM — é uma falha do recorte</a:t>
+            </a:r>
+          </a:p>
+        </p:txBody>
+      </p:sp>
+      <p:sp>
+        <p:nvSpPr>
+          <p:cNvPr id="20" name="Rounded Rectangle 20"/>
+          <p:cNvSpPr/>
+          <p:nvPr/>
+        </p:nvSpPr>
+        <p:spPr>
+          <a:xfrm>
+            <a:off x="640080" y="5532120"/>
+            <a:ext cx="10911535" cy="777240"/>
+          </a:xfrm>
+          <a:prstGeom prst="roundRect">
+            <a:avLst>
+              <a:gd name="adj" fmla="val 10000"/>
+            </a:avLst>
+          </a:prstGeom>
+          <a:solidFill>
+            <a:srgbClr val="E7ECFC"/>
+          </a:solidFill>
+          <a:ln>
+            <a:noFill/>
+          </a:ln>
+          <a:effectLst/>
+        </p:spPr>
+        <p:style>
+          <a:lnRef idx="1">
+            <a:schemeClr val="accent1"/>
+          </a:lnRef>
+          <a:fillRef idx="3">
+            <a:schemeClr val="accent1"/>
+          </a:fillRef>
+          <a:effectRef idx="2">
+            <a:schemeClr val="accent1"/>
+          </a:effectRef>
+          <a:fontRef idx="minor">
+            <a:schemeClr val="lt1"/>
+          </a:fontRef>
+        </p:style>
+        <p:txBody>
+          <a:bodyPr rtlCol="0" anchor="ctr" wrap="square" lIns="320040" rIns="320040"/>
+          <a:lstStyle/>
+          <a:p>
+            <a:pPr algn="l">
+              <a:lnSpc>
+                <a:spcPct val="115000"/>
+              </a:lnSpc>
+            </a:pPr>
+            <a:r>
+              <a:rPr sz="1300" b="0" i="1">
+                <a:solidFill>
+                  <a:srgbClr val="1B2A4A"/>
+                </a:solidFill>
+                <a:latin typeface="Calibri"/>
+              </a:rPr>
+              <a:t>Isso ainda não foi testado em texto não-literário nem contra diferentes estratégias de corte de chunk — é uma pergunta de continuidade registrada no projeto, não uma conclusão fechada. Mas é testável: comparar a resposta da IA sobre um trecho colado com e sem o contexto ao redor.</a:t>
+            </a:r>
+          </a:p>
+        </p:txBody>
+      </p:sp>
+      <p:sp>
+        <p:nvSpPr>
+          <p:cNvPr id="21" name="TextBox 21"/>
+          <p:cNvSpPr txBox="1"/>
+          <p:nvPr/>
+        </p:nvSpPr>
+        <p:spPr>
+          <a:xfrm>
+            <a:off x="640080" y="6400800"/>
+            <a:ext cx="5486400" cy="320040"/>
+          </a:xfrm>
+          <a:prstGeom prst="rect">
+            <a:avLst/>
+          </a:prstGeom>
+          <a:noFill/>
+        </p:spPr>
+        <p:txBody>
+          <a:bodyPr wrap="square" lIns="0" rIns="0" tIns="0" bIns="0">
+            <a:spAutoFit/>
+          </a:bodyPr>
+          <a:lstStyle/>
+          <a:p>
+            <a:pPr algn="l"/>
+            <a:r>
+              <a:rPr sz="1000" b="0" i="0">
+                <a:solidFill>
+                  <a:srgbClr val="868E96"/>
+                </a:solidFill>
+                <a:latin typeface="Calibri"/>
+              </a:rPr>
+              <a:t>Laboratório de Estresse Semântico</a:t>
+            </a:r>
+          </a:p>
+        </p:txBody>
+      </p:sp>
+      <p:sp>
+        <p:nvSpPr>
+          <p:cNvPr id="22" name="TextBox 22"/>
+          <p:cNvSpPr txBox="1"/>
+          <p:nvPr/>
+        </p:nvSpPr>
+        <p:spPr>
+          <a:xfrm>
+            <a:off x="10637215" y="6400800"/>
+            <a:ext cx="914400" cy="320040"/>
+          </a:xfrm>
+          <a:prstGeom prst="rect">
+            <a:avLst/>
+          </a:prstGeom>
+          <a:noFill/>
+        </p:spPr>
+        <p:txBody>
+          <a:bodyPr wrap="square" lIns="0" rIns="0" tIns="0" bIns="0">
+            <a:spAutoFit/>
+          </a:bodyPr>
+          <a:lstStyle/>
+          <a:p>
+            <a:pPr algn="r"/>
+            <a:r>
+              <a:rPr sz="1000" b="0" i="0">
+                <a:solidFill>
+                  <a:srgbClr val="868E96"/>
+                </a:solidFill>
+                <a:latin typeface="Calibri"/>
+              </a:rPr>
+              <a:t>13</a:t>
+            </a:r>
+          </a:p>
+        </p:txBody>
+      </p:sp>
+    </p:spTree>
+  </p:cSld>
+  <p:clrMapOvr>
+    <a:masterClrMapping/>
+  </p:clrMapOvr>
+</p:sld>
+</file>
+
 <file path=ppt/slides/slide2.xml><?xml version="1.0" encoding="utf-8"?>
 <p:sld xmlns:a="http://schemas.openxmlformats.org/drawingml/2006/main" xmlns:p="http://schemas.openxmlformats.org/presentationml/2006/main" xmlns:r="http://schemas.openxmlformats.org/officeDocument/2006/relationships">
   <p:cSld>
@@ -10728,7 +11452,7 @@
                 </a:solidFill>
                 <a:latin typeface="Calibri"/>
               </a:rPr>
-              <a:t>13</a:t>
+              <a:t>14</a:t>
             </a:r>
           </a:p>
         </p:txBody>
